--- a/courses/build/farmer-5day/F-D3.pptx
+++ b/courses/build/farmer-5day/F-D3.pptx
@@ -4800,7 +4800,7 @@
     <p:bg>
       <p:bgPr>
         <a:solidFill>
-          <a:srgbClr val="1F4D2B"/>
+          <a:srgbClr val="2F5D34"/>
         </a:solidFill>
         <a:effectLst/>
       </p:bgPr>
@@ -4842,9 +4842,9 @@
             <a:r>
               <a:rPr sz="1000" b="0">
                 <a:solidFill>
-                  <a:srgbClr val="A8D88A"/>
-                </a:solidFill>
-                <a:latin typeface="Arial"/>
+                  <a:srgbClr val="EFE6D2"/>
+                </a:solidFill>
+                <a:latin typeface="Verdana"/>
               </a:rPr>
               <a:t>F-D3-01</a:t>
             </a:r>
@@ -4881,9 +4881,9 @@
             <a:r>
               <a:rPr sz="1000" b="0">
                 <a:solidFill>
-                  <a:srgbClr val="A8D88A"/>
-                </a:solidFill>
-                <a:latin typeface="Arial"/>
+                  <a:srgbClr val="EFE6D2"/>
+                </a:solidFill>
+                <a:latin typeface="Verdana"/>
               </a:rPr>
               <a:t>Grow Food, Grow Strong</a:t>
             </a:r>
@@ -4920,9 +4920,9 @@
             <a:r>
               <a:rPr sz="4800" b="1">
                 <a:solidFill>
-                  <a:srgbClr val="F7F2E9"/>
-                </a:solidFill>
-                <a:latin typeface="Georgia"/>
+                  <a:srgbClr val="EFE6D2"/>
+                </a:solidFill>
+                <a:latin typeface="Rockwell"/>
               </a:rPr>
               <a:t>Day 3 · Living soil</a:t>
             </a:r>
@@ -4944,7 +4944,7 @@
             <a:avLst/>
           </a:prstGeom>
           <a:solidFill>
-            <a:srgbClr val="C07A1E"/>
+            <a:srgbClr val="B24E2A"/>
           </a:solidFill>
           <a:ln>
             <a:noFill/>
@@ -5003,9 +5003,9 @@
             <a:r>
               <a:rPr sz="2400" b="0">
                 <a:solidFill>
-                  <a:srgbClr val="A8D88A"/>
-                </a:solidFill>
-                <a:latin typeface="Arial"/>
+                  <a:srgbClr val="EFE6D2"/>
+                </a:solidFill>
+                <a:latin typeface="Verdana"/>
               </a:rPr>
               <a:t>Feed the soil, the soil feeds the plant</a:t>
             </a:r>
@@ -5027,11 +5027,11 @@
             <a:avLst/>
           </a:prstGeom>
           <a:solidFill>
-            <a:srgbClr val="FBF6EC"/>
+            <a:srgbClr val="EFE6D2"/>
           </a:solidFill>
           <a:ln w="15875">
             <a:solidFill>
-              <a:srgbClr val="E2D8C4"/>
+              <a:srgbClr val="2F5D34"/>
             </a:solidFill>
           </a:ln>
           <a:effectLst/>
@@ -5088,9 +5088,9 @@
             <a:r>
               <a:rPr sz="1200" b="1">
                 <a:solidFill>
-                  <a:srgbClr val="C07A1E"/>
-                </a:solidFill>
-                <a:latin typeface="Arial"/>
+                  <a:srgbClr val="B24E2A"/>
+                </a:solidFill>
+                <a:latin typeface="Verdana"/>
               </a:rPr>
               <a:t>IMAGE · F-IMG-14 · coming</a:t>
             </a:r>
@@ -5127,9 +5127,9 @@
             <a:r>
               <a:rPr sz="1800" b="1">
                 <a:solidFill>
-                  <a:srgbClr val="1F4D2B"/>
-                </a:solidFill>
-                <a:latin typeface="Georgia"/>
+                  <a:srgbClr val="1B1A17"/>
+                </a:solidFill>
+                <a:latin typeface="Rockwell"/>
               </a:rPr>
               <a:t>Dark crumbly soil</a:t>
             </a:r>
@@ -5166,9 +5166,9 @@
             <a:r>
               <a:rPr sz="1100" b="0">
                 <a:solidFill>
-                  <a:srgbClr val="20190F"/>
-                </a:solidFill>
-                <a:latin typeface="Arial"/>
+                  <a:srgbClr val="1B1A17"/>
+                </a:solidFill>
+                <a:latin typeface="Verdana"/>
               </a:rPr>
               <a:t>Two cupped hands holding very dark, crumbly soil with an earthworm and fine roots.</a:t>
             </a:r>
@@ -5189,7 +5189,7 @@
     <p:bg>
       <p:bgPr>
         <a:solidFill>
-          <a:srgbClr val="F7F2E9"/>
+          <a:srgbClr val="EFE6D2"/>
         </a:solidFill>
         <a:effectLst/>
       </p:bgPr>
@@ -5231,9 +5231,9 @@
             <a:r>
               <a:rPr sz="1000" b="0">
                 <a:solidFill>
-                  <a:srgbClr val="6B6255"/>
-                </a:solidFill>
-                <a:latin typeface="Arial"/>
+                  <a:srgbClr val="1B1A17"/>
+                </a:solidFill>
+                <a:latin typeface="Verdana"/>
               </a:rPr>
               <a:t>F-D3-10   ·   Poster F-P11</a:t>
             </a:r>
@@ -5270,9 +5270,9 @@
             <a:r>
               <a:rPr sz="1000" b="0">
                 <a:solidFill>
-                  <a:srgbClr val="6B6255"/>
-                </a:solidFill>
-                <a:latin typeface="Arial"/>
+                  <a:srgbClr val="1B1A17"/>
+                </a:solidFill>
+                <a:latin typeface="Verdana"/>
               </a:rPr>
               <a:t>Grow Food, Grow Strong</a:t>
             </a:r>
@@ -5309,9 +5309,9 @@
             <a:r>
               <a:rPr sz="3800" b="1">
                 <a:solidFill>
-                  <a:srgbClr val="1F4D2B"/>
-                </a:solidFill>
-                <a:latin typeface="Georgia"/>
+                  <a:srgbClr val="1B1A17"/>
+                </a:solidFill>
+                <a:latin typeface="Rockwell"/>
               </a:rPr>
               <a:t>Waste into food</a:t>
             </a:r>
@@ -5333,7 +5333,7 @@
             <a:avLst/>
           </a:prstGeom>
           <a:solidFill>
-            <a:srgbClr val="E2D8C4"/>
+            <a:srgbClr val="2F5D34"/>
           </a:solidFill>
           <a:ln>
             <a:noFill/>
@@ -5392,9 +5392,9 @@
             <a:r>
               <a:rPr sz="2800" b="0">
                 <a:solidFill>
-                  <a:srgbClr val="20190F"/>
-                </a:solidFill>
-                <a:latin typeface="Arial"/>
+                  <a:srgbClr val="1B1A17"/>
+                </a:solidFill>
+                <a:latin typeface="Verdana"/>
               </a:rPr>
               <a:t>•  Green · Brown · Water · Air</a:t>
             </a:r>
@@ -5416,11 +5416,11 @@
             <a:avLst/>
           </a:prstGeom>
           <a:solidFill>
-            <a:srgbClr val="FBF6EC"/>
+            <a:srgbClr val="EFE6D2"/>
           </a:solidFill>
           <a:ln w="15875">
             <a:solidFill>
-              <a:srgbClr val="E2D8C4"/>
+              <a:srgbClr val="2F5D34"/>
             </a:solidFill>
           </a:ln>
           <a:effectLst/>
@@ -5477,9 +5477,9 @@
             <a:r>
               <a:rPr sz="1200" b="1">
                 <a:solidFill>
-                  <a:srgbClr val="C07A1E"/>
-                </a:solidFill>
-                <a:latin typeface="Arial"/>
+                  <a:srgbClr val="B24E2A"/>
+                </a:solidFill>
+                <a:latin typeface="Verdana"/>
               </a:rPr>
               <a:t>POSTER ART · F-P11-ART · coming</a:t>
             </a:r>
@@ -5516,9 +5516,9 @@
             <a:r>
               <a:rPr sz="1800" b="1">
                 <a:solidFill>
-                  <a:srgbClr val="1F4D2B"/>
-                </a:solidFill>
-                <a:latin typeface="Georgia"/>
+                  <a:srgbClr val="1B1A17"/>
+                </a:solidFill>
+                <a:latin typeface="Rockwell"/>
               </a:rPr>
               <a:t>Artwork for F-P11 · Build a compost heap</a:t>
             </a:r>
@@ -5555,9 +5555,9 @@
             <a:r>
               <a:rPr sz="1100" b="0">
                 <a:solidFill>
-                  <a:srgbClr val="20190F"/>
-                </a:solidFill>
-                <a:latin typeface="Arial"/>
+                  <a:srgbClr val="1B1A17"/>
+                </a:solidFill>
+                <a:latin typeface="Verdana"/>
               </a:rPr>
               <a:t>A tall cut-away of a 1 m compost heap with visible layers from the bottom: sticks/stalks (with air gaps), thick yellow-brown dry grass, a thin green layer of fresh cuttings and peels, a dark thin manure layer, a sprinkle of soil, a watering can pouring — repeated three times, topped with a dry-grass blanket and a long stick pushed into the middle. Beside…</a:t>
             </a:r>
@@ -5578,7 +5578,7 @@
     <p:bg>
       <p:bgPr>
         <a:solidFill>
-          <a:srgbClr val="F7F2E9"/>
+          <a:srgbClr val="EFE6D2"/>
         </a:solidFill>
         <a:effectLst/>
       </p:bgPr>
@@ -5620,9 +5620,9 @@
             <a:r>
               <a:rPr sz="1000" b="0">
                 <a:solidFill>
-                  <a:srgbClr val="6B6255"/>
-                </a:solidFill>
-                <a:latin typeface="Arial"/>
+                  <a:srgbClr val="1B1A17"/>
+                </a:solidFill>
+                <a:latin typeface="Verdana"/>
               </a:rPr>
               <a:t>F-D3-11   ·   Poster F-P11</a:t>
             </a:r>
@@ -5659,9 +5659,9 @@
             <a:r>
               <a:rPr sz="1000" b="0">
                 <a:solidFill>
-                  <a:srgbClr val="6B6255"/>
-                </a:solidFill>
-                <a:latin typeface="Arial"/>
+                  <a:srgbClr val="1B1A17"/>
+                </a:solidFill>
+                <a:latin typeface="Verdana"/>
               </a:rPr>
               <a:t>Grow Food, Grow Strong</a:t>
             </a:r>
@@ -5698,9 +5698,9 @@
             <a:r>
               <a:rPr sz="3800" b="1">
                 <a:solidFill>
-                  <a:srgbClr val="1F4D2B"/>
-                </a:solidFill>
-                <a:latin typeface="Georgia"/>
+                  <a:srgbClr val="1B1A17"/>
+                </a:solidFill>
+                <a:latin typeface="Rockwell"/>
               </a:rPr>
               <a:t>The mix</a:t>
             </a:r>
@@ -5722,7 +5722,7 @@
             <a:avLst/>
           </a:prstGeom>
           <a:solidFill>
-            <a:srgbClr val="E2D8C4"/>
+            <a:srgbClr val="2F5D34"/>
           </a:solidFill>
           <a:ln>
             <a:noFill/>
@@ -5781,9 +5781,9 @@
             <a:r>
               <a:rPr sz="2800" b="0">
                 <a:solidFill>
-                  <a:srgbClr val="20190F"/>
-                </a:solidFill>
-                <a:latin typeface="Arial"/>
+                  <a:srgbClr val="1B1A17"/>
+                </a:solidFill>
+                <a:latin typeface="Verdana"/>
               </a:rPr>
               <a:t>•  2–3 buckets brown : 1 green</a:t>
             </a:r>
@@ -5797,9 +5797,9 @@
             <a:r>
               <a:rPr sz="2800" b="0">
                 <a:solidFill>
-                  <a:srgbClr val="20190F"/>
-                </a:solidFill>
-                <a:latin typeface="Arial"/>
+                  <a:srgbClr val="1B1A17"/>
+                </a:solidFill>
+                <a:latin typeface="Verdana"/>
               </a:rPr>
               <a:t>•  Damp like a squeezed cloth</a:t>
             </a:r>
@@ -5813,9 +5813,9 @@
             <a:r>
               <a:rPr sz="2800" b="0">
                 <a:solidFill>
-                  <a:srgbClr val="20190F"/>
-                </a:solidFill>
-                <a:latin typeface="Arial"/>
+                  <a:srgbClr val="1B1A17"/>
+                </a:solidFill>
+                <a:latin typeface="Verdana"/>
               </a:rPr>
               <a:t>•  1 m × 1 m × 1 m</a:t>
             </a:r>
@@ -5861,7 +5861,7 @@
             <a:avLst/>
           </a:prstGeom>
           <a:solidFill>
-            <a:srgbClr val="20190F"/>
+            <a:srgbClr val="1B1A17"/>
           </a:solidFill>
           <a:ln>
             <a:noFill/>
@@ -5920,9 +5920,9 @@
             <a:r>
               <a:rPr sz="1100" b="0">
                 <a:solidFill>
-                  <a:srgbClr val="F7F2E9"/>
-                </a:solidFill>
-                <a:latin typeface="Arial"/>
+                  <a:srgbClr val="EFE6D2"/>
+                </a:solidFill>
+                <a:latin typeface="Verdana"/>
               </a:rPr>
               <a:t>▶  Clip F-ANI-16 · play from the tablet: watch-10-compost-heap.mp4</a:t>
             </a:r>
@@ -5943,7 +5943,7 @@
     <p:bg>
       <p:bgPr>
         <a:solidFill>
-          <a:srgbClr val="F7F2E9"/>
+          <a:srgbClr val="EFE6D2"/>
         </a:solidFill>
         <a:effectLst/>
       </p:bgPr>
@@ -5985,9 +5985,9 @@
             <a:r>
               <a:rPr sz="1000" b="0">
                 <a:solidFill>
-                  <a:srgbClr val="6B6255"/>
-                </a:solidFill>
-                <a:latin typeface="Arial"/>
+                  <a:srgbClr val="1B1A17"/>
+                </a:solidFill>
+                <a:latin typeface="Verdana"/>
               </a:rPr>
               <a:t>F-D3-12</a:t>
             </a:r>
@@ -6024,9 +6024,9 @@
             <a:r>
               <a:rPr sz="1000" b="0">
                 <a:solidFill>
-                  <a:srgbClr val="6B6255"/>
-                </a:solidFill>
-                <a:latin typeface="Arial"/>
+                  <a:srgbClr val="1B1A17"/>
+                </a:solidFill>
+                <a:latin typeface="Verdana"/>
               </a:rPr>
               <a:t>Grow Food, Grow Strong</a:t>
             </a:r>
@@ -6048,7 +6048,7 @@
             <a:avLst/>
           </a:prstGeom>
           <a:solidFill>
-            <a:srgbClr val="C07A1E"/>
+            <a:srgbClr val="B24E2A"/>
           </a:solidFill>
           <a:ln>
             <a:noFill/>
@@ -6107,9 +6107,9 @@
             <a:r>
               <a:rPr sz="1400" b="1">
                 <a:solidFill>
-                  <a:srgbClr val="F7F2E9"/>
-                </a:solidFill>
-                <a:latin typeface="Arial"/>
+                  <a:srgbClr val="EFE6D2"/>
+                </a:solidFill>
+                <a:latin typeface="Verdana"/>
               </a:rPr>
               <a:t>YOUR TURN</a:t>
             </a:r>
@@ -6146,9 +6146,9 @@
             <a:r>
               <a:rPr sz="3800" b="1">
                 <a:solidFill>
-                  <a:srgbClr val="1F4D2B"/>
-                </a:solidFill>
-                <a:latin typeface="Georgia"/>
+                  <a:srgbClr val="1B1A17"/>
+                </a:solidFill>
+                <a:latin typeface="Rockwell"/>
               </a:rPr>
               <a:t>Build your heap</a:t>
             </a:r>
@@ -6170,7 +6170,7 @@
             <a:avLst/>
           </a:prstGeom>
           <a:solidFill>
-            <a:srgbClr val="E2D8C4"/>
+            <a:srgbClr val="2F5D34"/>
           </a:solidFill>
           <a:ln>
             <a:noFill/>
@@ -6229,9 +6229,9 @@
             <a:r>
               <a:rPr sz="2600" b="1">
                 <a:solidFill>
-                  <a:srgbClr val="20190F"/>
-                </a:solidFill>
-                <a:latin typeface="Arial"/>
+                  <a:srgbClr val="1B1A17"/>
+                </a:solidFill>
+                <a:latin typeface="Verdana"/>
               </a:rPr>
               <a:t>•  Sticks at the bottom</a:t>
             </a:r>
@@ -6245,9 +6245,9 @@
             <a:r>
               <a:rPr sz="2600" b="1">
                 <a:solidFill>
-                  <a:srgbClr val="20190F"/>
-                </a:solidFill>
-                <a:latin typeface="Arial"/>
+                  <a:srgbClr val="1B1A17"/>
+                </a:solidFill>
+                <a:latin typeface="Verdana"/>
               </a:rPr>
               <a:t>•  Brown · green · manure · soil · water</a:t>
             </a:r>
@@ -6261,9 +6261,9 @@
             <a:r>
               <a:rPr sz="2600" b="1">
                 <a:solidFill>
-                  <a:srgbClr val="20190F"/>
-                </a:solidFill>
-                <a:latin typeface="Arial"/>
+                  <a:srgbClr val="1B1A17"/>
+                </a:solidFill>
+                <a:latin typeface="Verdana"/>
               </a:rPr>
               <a:t>•  Stick in the middle, cover</a:t>
             </a:r>
@@ -6285,11 +6285,11 @@
             <a:avLst/>
           </a:prstGeom>
           <a:solidFill>
-            <a:srgbClr val="FBF6EC"/>
+            <a:srgbClr val="EFE6D2"/>
           </a:solidFill>
           <a:ln w="15875">
             <a:solidFill>
-              <a:srgbClr val="E2D8C4"/>
+              <a:srgbClr val="2F5D34"/>
             </a:solidFill>
           </a:ln>
           <a:effectLst/>
@@ -6346,9 +6346,9 @@
             <a:r>
               <a:rPr sz="1200" b="1">
                 <a:solidFill>
-                  <a:srgbClr val="C07A1E"/>
-                </a:solidFill>
-                <a:latin typeface="Arial"/>
+                  <a:srgbClr val="B24E2A"/>
+                </a:solidFill>
+                <a:latin typeface="Verdana"/>
               </a:rPr>
               <a:t>IMAGE · F-IMG-19 · coming</a:t>
             </a:r>
@@ -6385,9 +6385,9 @@
             <a:r>
               <a:rPr sz="1800" b="1">
                 <a:solidFill>
-                  <a:srgbClr val="1F4D2B"/>
-                </a:solidFill>
-                <a:latin typeface="Georgia"/>
+                  <a:srgbClr val="1B1A17"/>
+                </a:solidFill>
+                <a:latin typeface="Rockwell"/>
               </a:rPr>
               <a:t>Building the heap</a:t>
             </a:r>
@@ -6424,9 +6424,9 @@
             <a:r>
               <a:rPr sz="1100" b="0">
                 <a:solidFill>
-                  <a:srgbClr val="20190F"/>
-                </a:solidFill>
-                <a:latin typeface="Arial"/>
+                  <a:srgbClr val="1B1A17"/>
+                </a:solidFill>
+                <a:latin typeface="Verdana"/>
               </a:rPr>
               <a:t>A group of five building a 1 m compost heap in layers; a long stick standing in the middle; piles of browns and greens beside.</a:t>
             </a:r>
@@ -6447,7 +6447,7 @@
     <p:bg>
       <p:bgPr>
         <a:solidFill>
-          <a:srgbClr val="F7F2E9"/>
+          <a:srgbClr val="EFE6D2"/>
         </a:solidFill>
         <a:effectLst/>
       </p:bgPr>
@@ -6489,9 +6489,9 @@
             <a:r>
               <a:rPr sz="1000" b="0">
                 <a:solidFill>
-                  <a:srgbClr val="6B6255"/>
-                </a:solidFill>
-                <a:latin typeface="Arial"/>
+                  <a:srgbClr val="1B1A17"/>
+                </a:solidFill>
+                <a:latin typeface="Verdana"/>
               </a:rPr>
               <a:t>F-D3-13</a:t>
             </a:r>
@@ -6528,9 +6528,9 @@
             <a:r>
               <a:rPr sz="1000" b="0">
                 <a:solidFill>
-                  <a:srgbClr val="6B6255"/>
-                </a:solidFill>
-                <a:latin typeface="Arial"/>
+                  <a:srgbClr val="1B1A17"/>
+                </a:solidFill>
+                <a:latin typeface="Verdana"/>
               </a:rPr>
               <a:t>Grow Food, Grow Strong</a:t>
             </a:r>
@@ -6567,9 +6567,9 @@
             <a:r>
               <a:rPr sz="3800" b="1">
                 <a:solidFill>
-                  <a:srgbClr val="1F4D2B"/>
-                </a:solidFill>
-                <a:latin typeface="Georgia"/>
+                  <a:srgbClr val="1B1A17"/>
+                </a:solidFill>
+                <a:latin typeface="Rockwell"/>
               </a:rPr>
               <a:t>Never in the heap</a:t>
             </a:r>
@@ -6591,7 +6591,7 @@
             <a:avLst/>
           </a:prstGeom>
           <a:solidFill>
-            <a:srgbClr val="E2D8C4"/>
+            <a:srgbClr val="2F5D34"/>
           </a:solidFill>
           <a:ln>
             <a:noFill/>
@@ -6650,9 +6650,9 @@
             <a:r>
               <a:rPr sz="2400" b="0">
                 <a:solidFill>
-                  <a:srgbClr val="20190F"/>
-                </a:solidFill>
-                <a:latin typeface="Arial"/>
+                  <a:srgbClr val="1B1A17"/>
+                </a:solidFill>
+                <a:latin typeface="Verdana"/>
               </a:rPr>
               <a:t>•  Meat, bones, oil, dairy</a:t>
             </a:r>
@@ -6666,9 +6666,9 @@
             <a:r>
               <a:rPr sz="2400" b="0">
                 <a:solidFill>
-                  <a:srgbClr val="20190F"/>
-                </a:solidFill>
-                <a:latin typeface="Arial"/>
+                  <a:srgbClr val="1B1A17"/>
+                </a:solidFill>
+                <a:latin typeface="Verdana"/>
               </a:rPr>
               <a:t>•  Plastic, glass, tins</a:t>
             </a:r>
@@ -6682,9 +6682,9 @@
             <a:r>
               <a:rPr sz="2400" b="0">
                 <a:solidFill>
-                  <a:srgbClr val="20190F"/>
-                </a:solidFill>
-                <a:latin typeface="Arial"/>
+                  <a:srgbClr val="1B1A17"/>
+                </a:solidFill>
+                <a:latin typeface="Verdana"/>
               </a:rPr>
               <a:t>•  Pet or human waste · sick plants</a:t>
             </a:r>
@@ -6706,11 +6706,11 @@
             <a:avLst/>
           </a:prstGeom>
           <a:solidFill>
-            <a:srgbClr val="FBF6EC"/>
+            <a:srgbClr val="EFE6D2"/>
           </a:solidFill>
           <a:ln w="15875">
             <a:solidFill>
-              <a:srgbClr val="E2D8C4"/>
+              <a:srgbClr val="2F5D34"/>
             </a:solidFill>
           </a:ln>
           <a:effectLst/>
@@ -6767,9 +6767,9 @@
             <a:r>
               <a:rPr sz="1200" b="1">
                 <a:solidFill>
-                  <a:srgbClr val="C07A1E"/>
-                </a:solidFill>
-                <a:latin typeface="Arial"/>
+                  <a:srgbClr val="B24E2A"/>
+                </a:solidFill>
+                <a:latin typeface="Verdana"/>
               </a:rPr>
               <a:t>IMAGE · F-IMG-20 · coming</a:t>
             </a:r>
@@ -6806,9 +6806,9 @@
             <a:r>
               <a:rPr sz="1800" b="1">
                 <a:solidFill>
-                  <a:srgbClr val="1F4D2B"/>
-                </a:solidFill>
-                <a:latin typeface="Georgia"/>
+                  <a:srgbClr val="1B1A17"/>
+                </a:solidFill>
+                <a:latin typeface="Rockwell"/>
               </a:rPr>
               <a:t>Never in the heap</a:t>
             </a:r>
@@ -6845,9 +6845,9 @@
             <a:r>
               <a:rPr sz="1100" b="0">
                 <a:solidFill>
-                  <a:srgbClr val="20190F"/>
-                </a:solidFill>
-                <a:latin typeface="Arial"/>
+                  <a:srgbClr val="1B1A17"/>
+                </a:solidFill>
+                <a:latin typeface="Verdana"/>
               </a:rPr>
               <a:t>A row of items each with a clear red circle-and-slash overlay: a bone, a bottle, a tin, a cooking-oil bottle, a plastic bag, a dog.</a:t>
             </a:r>
@@ -6868,7 +6868,7 @@
     <p:bg>
       <p:bgPr>
         <a:solidFill>
-          <a:srgbClr val="F7F2E9"/>
+          <a:srgbClr val="EFE6D2"/>
         </a:solidFill>
         <a:effectLst/>
       </p:bgPr>
@@ -6910,9 +6910,9 @@
             <a:r>
               <a:rPr sz="1000" b="0">
                 <a:solidFill>
-                  <a:srgbClr val="6B6255"/>
-                </a:solidFill>
-                <a:latin typeface="Arial"/>
+                  <a:srgbClr val="1B1A17"/>
+                </a:solidFill>
+                <a:latin typeface="Verdana"/>
               </a:rPr>
               <a:t>F-D3-14   ·   Poster F-P12</a:t>
             </a:r>
@@ -6949,9 +6949,9 @@
             <a:r>
               <a:rPr sz="1000" b="0">
                 <a:solidFill>
-                  <a:srgbClr val="6B6255"/>
-                </a:solidFill>
-                <a:latin typeface="Arial"/>
+                  <a:srgbClr val="1B1A17"/>
+                </a:solidFill>
+                <a:latin typeface="Verdana"/>
               </a:rPr>
               <a:t>Grow Food, Grow Strong</a:t>
             </a:r>
@@ -6973,7 +6973,7 @@
             <a:avLst/>
           </a:prstGeom>
           <a:solidFill>
-            <a:srgbClr val="C07A1E"/>
+            <a:srgbClr val="B24E2A"/>
           </a:solidFill>
           <a:ln>
             <a:noFill/>
@@ -7032,9 +7032,9 @@
             <a:r>
               <a:rPr sz="1400" b="1">
                 <a:solidFill>
-                  <a:srgbClr val="F7F2E9"/>
-                </a:solidFill>
-                <a:latin typeface="Arial"/>
+                  <a:srgbClr val="EFE6D2"/>
+                </a:solidFill>
+                <a:latin typeface="Verdana"/>
               </a:rPr>
               <a:t>YOUR TURN</a:t>
             </a:r>
@@ -7071,9 +7071,9 @@
             <a:r>
               <a:rPr sz="3800" b="1">
                 <a:solidFill>
-                  <a:srgbClr val="1F4D2B"/>
-                </a:solidFill>
-                <a:latin typeface="Georgia"/>
+                  <a:srgbClr val="1B1A17"/>
+                </a:solidFill>
+                <a:latin typeface="Rockwell"/>
               </a:rPr>
               <a:t>Liquid manure</a:t>
             </a:r>
@@ -7095,7 +7095,7 @@
             <a:avLst/>
           </a:prstGeom>
           <a:solidFill>
-            <a:srgbClr val="E2D8C4"/>
+            <a:srgbClr val="2F5D34"/>
           </a:solidFill>
           <a:ln>
             <a:noFill/>
@@ -7154,9 +7154,9 @@
             <a:r>
               <a:rPr sz="2600" b="1">
                 <a:solidFill>
-                  <a:srgbClr val="20190F"/>
-                </a:solidFill>
-                <a:latin typeface="Arial"/>
+                  <a:srgbClr val="1B1A17"/>
+                </a:solidFill>
+                <a:latin typeface="Verdana"/>
               </a:rPr>
               <a:t>•  Manure in a sack, in a drum of water</a:t>
             </a:r>
@@ -7170,9 +7170,9 @@
             <a:r>
               <a:rPr sz="2600" b="1">
                 <a:solidFill>
-                  <a:srgbClr val="20190F"/>
-                </a:solidFill>
-                <a:latin typeface="Arial"/>
+                  <a:srgbClr val="1B1A17"/>
+                </a:solidFill>
+                <a:latin typeface="Verdana"/>
               </a:rPr>
               <a:t>•  Stir every 2–3 days for 2 weeks</a:t>
             </a:r>
@@ -7186,9 +7186,9 @@
             <a:r>
               <a:rPr sz="2600" b="1">
                 <a:solidFill>
-                  <a:srgbClr val="20190F"/>
-                </a:solidFill>
-                <a:latin typeface="Arial"/>
+                  <a:srgbClr val="1B1A17"/>
+                </a:solidFill>
+                <a:latin typeface="Verdana"/>
               </a:rPr>
               <a:t>•  1 cup to 10 cups water, on the soil</a:t>
             </a:r>
@@ -7210,11 +7210,11 @@
             <a:avLst/>
           </a:prstGeom>
           <a:solidFill>
-            <a:srgbClr val="FBF6EC"/>
+            <a:srgbClr val="EFE6D2"/>
           </a:solidFill>
           <a:ln w="15875">
             <a:solidFill>
-              <a:srgbClr val="E2D8C4"/>
+              <a:srgbClr val="2F5D34"/>
             </a:solidFill>
           </a:ln>
           <a:effectLst/>
@@ -7271,9 +7271,9 @@
             <a:r>
               <a:rPr sz="1200" b="1">
                 <a:solidFill>
-                  <a:srgbClr val="C07A1E"/>
-                </a:solidFill>
-                <a:latin typeface="Arial"/>
+                  <a:srgbClr val="B24E2A"/>
+                </a:solidFill>
+                <a:latin typeface="Verdana"/>
               </a:rPr>
               <a:t>ANIMATION · F-ANI-17 · coming</a:t>
             </a:r>
@@ -7310,9 +7310,9 @@
             <a:r>
               <a:rPr sz="1800" b="1">
                 <a:solidFill>
-                  <a:srgbClr val="1F4D2B"/>
-                </a:solidFill>
-                <a:latin typeface="Georgia"/>
+                  <a:srgbClr val="1B1A17"/>
+                </a:solidFill>
+                <a:latin typeface="Rockwell"/>
               </a:rPr>
               <a:t>Liquid manure drum</a:t>
             </a:r>
@@ -7349,9 +7349,9 @@
             <a:r>
               <a:rPr sz="1100" b="0">
                 <a:solidFill>
-                  <a:srgbClr val="20190F"/>
-                </a:solidFill>
-                <a:latin typeface="Arial"/>
+                  <a:srgbClr val="1B1A17"/>
+                </a:solidFill>
+                <a:latin typeface="Verdana"/>
               </a:rPr>
               <a:t>Side cut-away of a 20 L plastic drum. (0–3 s) a hand lowers a hessian sack of dark manure on a string tied to a stick laid across the drum mouth. (3–6 s) water pours in to near the brim, a few green leaves added, lid placed. (6–10 s) a day-counter shown as sun/moon icons cycling 14 times while a stick stirs every few cycles; the water darkens to…</a:t>
             </a:r>
@@ -7372,7 +7372,7 @@
     <p:bg>
       <p:bgPr>
         <a:solidFill>
-          <a:srgbClr val="F7F2E9"/>
+          <a:srgbClr val="EFE6D2"/>
         </a:solidFill>
         <a:effectLst/>
       </p:bgPr>
@@ -7414,9 +7414,9 @@
             <a:r>
               <a:rPr sz="1000" b="0">
                 <a:solidFill>
-                  <a:srgbClr val="6B6255"/>
-                </a:solidFill>
-                <a:latin typeface="Arial"/>
+                  <a:srgbClr val="1B1A17"/>
+                </a:solidFill>
+                <a:latin typeface="Verdana"/>
               </a:rPr>
               <a:t>F-D3-15   ·   Poster F-P12</a:t>
             </a:r>
@@ -7453,9 +7453,9 @@
             <a:r>
               <a:rPr sz="1000" b="0">
                 <a:solidFill>
-                  <a:srgbClr val="6B6255"/>
-                </a:solidFill>
-                <a:latin typeface="Arial"/>
+                  <a:srgbClr val="1B1A17"/>
+                </a:solidFill>
+                <a:latin typeface="Verdana"/>
               </a:rPr>
               <a:t>Grow Food, Grow Strong</a:t>
             </a:r>
@@ -7477,7 +7477,7 @@
             <a:avLst/>
           </a:prstGeom>
           <a:solidFill>
-            <a:srgbClr val="C07A1E"/>
+            <a:srgbClr val="B24E2A"/>
           </a:solidFill>
           <a:ln>
             <a:noFill/>
@@ -7536,9 +7536,9 @@
             <a:r>
               <a:rPr sz="1400" b="1">
                 <a:solidFill>
-                  <a:srgbClr val="F7F2E9"/>
-                </a:solidFill>
-                <a:latin typeface="Arial"/>
+                  <a:srgbClr val="EFE6D2"/>
+                </a:solidFill>
+                <a:latin typeface="Verdana"/>
               </a:rPr>
               <a:t>YOUR TURN</a:t>
             </a:r>
@@ -7575,9 +7575,9 @@
             <a:r>
               <a:rPr sz="3800" b="1">
                 <a:solidFill>
-                  <a:srgbClr val="1F4D2B"/>
-                </a:solidFill>
-                <a:latin typeface="Georgia"/>
+                  <a:srgbClr val="1B1A17"/>
+                </a:solidFill>
+                <a:latin typeface="Rockwell"/>
               </a:rPr>
               <a:t>Worm farm</a:t>
             </a:r>
@@ -7599,7 +7599,7 @@
             <a:avLst/>
           </a:prstGeom>
           <a:solidFill>
-            <a:srgbClr val="E2D8C4"/>
+            <a:srgbClr val="2F5D34"/>
           </a:solidFill>
           <a:ln>
             <a:noFill/>
@@ -7658,9 +7658,9 @@
             <a:r>
               <a:rPr sz="2600" b="1">
                 <a:solidFill>
-                  <a:srgbClr val="20190F"/>
-                </a:solidFill>
-                <a:latin typeface="Arial"/>
+                  <a:srgbClr val="1B1A17"/>
+                </a:solidFill>
+                <a:latin typeface="Verdana"/>
               </a:rPr>
               <a:t>•  Red compost worms, not garden worms</a:t>
             </a:r>
@@ -7674,9 +7674,9 @@
             <a:r>
               <a:rPr sz="2600" b="1">
                 <a:solidFill>
-                  <a:srgbClr val="20190F"/>
-                </a:solidFill>
-                <a:latin typeface="Arial"/>
+                  <a:srgbClr val="1B1A17"/>
+                </a:solidFill>
+                <a:latin typeface="Verdana"/>
               </a:rPr>
               <a:t>•  Damp paper bedding · peels · shade</a:t>
             </a:r>
@@ -7690,9 +7690,9 @@
             <a:r>
               <a:rPr sz="2600" b="1">
                 <a:solidFill>
-                  <a:srgbClr val="20190F"/>
-                </a:solidFill>
-                <a:latin typeface="Arial"/>
+                  <a:srgbClr val="1B1A17"/>
+                </a:solidFill>
+                <a:latin typeface="Verdana"/>
               </a:rPr>
               <a:t>•  No citrus, onion, meat, oil</a:t>
             </a:r>
@@ -7714,11 +7714,11 @@
             <a:avLst/>
           </a:prstGeom>
           <a:solidFill>
-            <a:srgbClr val="FBF6EC"/>
+            <a:srgbClr val="EFE6D2"/>
           </a:solidFill>
           <a:ln w="15875">
             <a:solidFill>
-              <a:srgbClr val="E2D8C4"/>
+              <a:srgbClr val="2F5D34"/>
             </a:solidFill>
           </a:ln>
           <a:effectLst/>
@@ -7775,9 +7775,9 @@
             <a:r>
               <a:rPr sz="1200" b="1">
                 <a:solidFill>
-                  <a:srgbClr val="C07A1E"/>
-                </a:solidFill>
-                <a:latin typeface="Arial"/>
+                  <a:srgbClr val="B24E2A"/>
+                </a:solidFill>
+                <a:latin typeface="Verdana"/>
               </a:rPr>
               <a:t>ANIMATION · F-ANI-18 · coming</a:t>
             </a:r>
@@ -7814,9 +7814,9 @@
             <a:r>
               <a:rPr sz="1800" b="1">
                 <a:solidFill>
-                  <a:srgbClr val="1F4D2B"/>
-                </a:solidFill>
-                <a:latin typeface="Georgia"/>
+                  <a:srgbClr val="1B1A17"/>
+                </a:solidFill>
+                <a:latin typeface="Rockwell"/>
               </a:rPr>
               <a:t>Worm farm layers</a:t>
             </a:r>
@@ -7853,9 +7853,9 @@
             <a:r>
               <a:rPr sz="1100" b="0">
                 <a:solidFill>
-                  <a:srgbClr val="20190F"/>
-                </a:solidFill>
-                <a:latin typeface="Arial"/>
+                  <a:srgbClr val="1B1A17"/>
+                </a:solidFill>
+                <a:latin typeface="Verdana"/>
               </a:rPr>
               <a:t>Two stacked containers in shade, front cut-away. Top: holes in the base, damp shredded paper bedding, a handful of red worms placed on it, vegetable peels added to one side, a damp sack laid over. Time passes (sun/moon icons): peels shrink, dark crumbly castings build up, a few drops of dark liquid drip through the holes into the bottom container, which…</a:t>
             </a:r>
@@ -7876,7 +7876,7 @@
     <p:bg>
       <p:bgPr>
         <a:solidFill>
-          <a:srgbClr val="F7F2E9"/>
+          <a:srgbClr val="EFE6D2"/>
         </a:solidFill>
         <a:effectLst/>
       </p:bgPr>
@@ -7918,9 +7918,9 @@
             <a:r>
               <a:rPr sz="1000" b="0">
                 <a:solidFill>
-                  <a:srgbClr val="6B6255"/>
-                </a:solidFill>
-                <a:latin typeface="Arial"/>
+                  <a:srgbClr val="1B1A17"/>
+                </a:solidFill>
+                <a:latin typeface="Verdana"/>
               </a:rPr>
               <a:t>F-D3-16</a:t>
             </a:r>
@@ -7957,9 +7957,9 @@
             <a:r>
               <a:rPr sz="1000" b="0">
                 <a:solidFill>
-                  <a:srgbClr val="6B6255"/>
-                </a:solidFill>
-                <a:latin typeface="Arial"/>
+                  <a:srgbClr val="1B1A17"/>
+                </a:solidFill>
+                <a:latin typeface="Verdana"/>
               </a:rPr>
               <a:t>Grow Food, Grow Strong</a:t>
             </a:r>
@@ -7996,9 +7996,9 @@
             <a:r>
               <a:rPr sz="3800" b="1">
                 <a:solidFill>
-                  <a:srgbClr val="1F4D2B"/>
-                </a:solidFill>
-                <a:latin typeface="Georgia"/>
+                  <a:srgbClr val="1B1A17"/>
+                </a:solidFill>
+                <a:latin typeface="Rockwell"/>
               </a:rPr>
               <a:t>Plants that feed the soil</a:t>
             </a:r>
@@ -8020,7 +8020,7 @@
             <a:avLst/>
           </a:prstGeom>
           <a:solidFill>
-            <a:srgbClr val="E2D8C4"/>
+            <a:srgbClr val="2F5D34"/>
           </a:solidFill>
           <a:ln>
             <a:noFill/>
@@ -8079,9 +8079,9 @@
             <a:r>
               <a:rPr sz="2400" b="0">
                 <a:solidFill>
-                  <a:srgbClr val="20190F"/>
-                </a:solidFill>
-                <a:latin typeface="Arial"/>
+                  <a:srgbClr val="1B1A17"/>
+                </a:solidFill>
+                <a:latin typeface="Verdana"/>
               </a:rPr>
               <a:t>•  Summer: beans, cowpeas, lablab</a:t>
             </a:r>
@@ -8095,9 +8095,9 @@
             <a:r>
               <a:rPr sz="2400" b="0">
                 <a:solidFill>
-                  <a:srgbClr val="20190F"/>
-                </a:solidFill>
-                <a:latin typeface="Arial"/>
+                  <a:srgbClr val="1B1A17"/>
+                </a:solidFill>
+                <a:latin typeface="Verdana"/>
               </a:rPr>
               <a:t>•  Winter: oats, peas</a:t>
             </a:r>
@@ -8111,9 +8111,9 @@
             <a:r>
               <a:rPr sz="2400" b="0">
                 <a:solidFill>
-                  <a:srgbClr val="20190F"/>
-                </a:solidFill>
-                <a:latin typeface="Arial"/>
+                  <a:srgbClr val="1B1A17"/>
+                </a:solidFill>
+                <a:latin typeface="Verdana"/>
               </a:rPr>
               <a:t>•  Cut before flowers, lay as mulch</a:t>
             </a:r>
@@ -8135,11 +8135,11 @@
             <a:avLst/>
           </a:prstGeom>
           <a:solidFill>
-            <a:srgbClr val="FBF6EC"/>
+            <a:srgbClr val="EFE6D2"/>
           </a:solidFill>
           <a:ln w="15875">
             <a:solidFill>
-              <a:srgbClr val="E2D8C4"/>
+              <a:srgbClr val="2F5D34"/>
             </a:solidFill>
           </a:ln>
           <a:effectLst/>
@@ -8196,9 +8196,9 @@
             <a:r>
               <a:rPr sz="1200" b="1">
                 <a:solidFill>
-                  <a:srgbClr val="C07A1E"/>
-                </a:solidFill>
-                <a:latin typeface="Arial"/>
+                  <a:srgbClr val="B24E2A"/>
+                </a:solidFill>
+                <a:latin typeface="Verdana"/>
               </a:rPr>
               <a:t>IMAGE · F-IMG-21 · coming</a:t>
             </a:r>
@@ -8235,9 +8235,9 @@
             <a:r>
               <a:rPr sz="1800" b="1">
                 <a:solidFill>
-                  <a:srgbClr val="1F4D2B"/>
-                </a:solidFill>
-                <a:latin typeface="Georgia"/>
+                  <a:srgbClr val="1B1A17"/>
+                </a:solidFill>
+                <a:latin typeface="Rockwell"/>
               </a:rPr>
               <a:t>Green manure</a:t>
             </a:r>
@@ -8274,9 +8274,9 @@
             <a:r>
               <a:rPr sz="1100" b="0">
                 <a:solidFill>
-                  <a:srgbClr val="20190F"/>
-                </a:solidFill>
-                <a:latin typeface="Arial"/>
+                  <a:srgbClr val="1B1A17"/>
+                </a:solidFill>
+                <a:latin typeface="Verdana"/>
               </a:rPr>
               <a:t>A bed of dense bushy legume plants being cut at flowering and laid on the soil as mulch.</a:t>
             </a:r>
@@ -8297,7 +8297,7 @@
     <p:bg>
       <p:bgPr>
         <a:solidFill>
-          <a:srgbClr val="F7F2E9"/>
+          <a:srgbClr val="EFE6D2"/>
         </a:solidFill>
         <a:effectLst/>
       </p:bgPr>
@@ -8339,9 +8339,9 @@
             <a:r>
               <a:rPr sz="1000" b="0">
                 <a:solidFill>
-                  <a:srgbClr val="6B6255"/>
-                </a:solidFill>
-                <a:latin typeface="Arial"/>
+                  <a:srgbClr val="1B1A17"/>
+                </a:solidFill>
+                <a:latin typeface="Verdana"/>
               </a:rPr>
               <a:t>F-D3-17</a:t>
             </a:r>
@@ -8378,9 +8378,9 @@
             <a:r>
               <a:rPr sz="1000" b="0">
                 <a:solidFill>
-                  <a:srgbClr val="6B6255"/>
-                </a:solidFill>
-                <a:latin typeface="Arial"/>
+                  <a:srgbClr val="1B1A17"/>
+                </a:solidFill>
+                <a:latin typeface="Verdana"/>
               </a:rPr>
               <a:t>Grow Food, Grow Strong</a:t>
             </a:r>
@@ -8402,7 +8402,7 @@
             <a:avLst/>
           </a:prstGeom>
           <a:solidFill>
-            <a:srgbClr val="C07A1E"/>
+            <a:srgbClr val="B24E2A"/>
           </a:solidFill>
           <a:ln>
             <a:noFill/>
@@ -8461,9 +8461,9 @@
             <a:r>
               <a:rPr sz="1400" b="1">
                 <a:solidFill>
-                  <a:srgbClr val="F7F2E9"/>
-                </a:solidFill>
-                <a:latin typeface="Arial"/>
+                  <a:srgbClr val="EFE6D2"/>
+                </a:solidFill>
+                <a:latin typeface="Verdana"/>
               </a:rPr>
               <a:t>YOUR TURN</a:t>
             </a:r>
@@ -8500,9 +8500,9 @@
             <a:r>
               <a:rPr sz="3800" b="1">
                 <a:solidFill>
-                  <a:srgbClr val="1F4D2B"/>
-                </a:solidFill>
-                <a:latin typeface="Georgia"/>
+                  <a:srgbClr val="1B1A17"/>
+                </a:solidFill>
+                <a:latin typeface="Rockwell"/>
               </a:rPr>
               <a:t>My soil plan</a:t>
             </a:r>
@@ -8524,7 +8524,7 @@
             <a:avLst/>
           </a:prstGeom>
           <a:solidFill>
-            <a:srgbClr val="E2D8C4"/>
+            <a:srgbClr val="2F5D34"/>
           </a:solidFill>
           <a:ln>
             <a:noFill/>
@@ -8583,9 +8583,9 @@
             <a:r>
               <a:rPr sz="3000" b="1">
                 <a:solidFill>
-                  <a:srgbClr val="20190F"/>
-                </a:solidFill>
-                <a:latin typeface="Arial"/>
+                  <a:srgbClr val="1B1A17"/>
+                </a:solidFill>
+                <a:latin typeface="Verdana"/>
               </a:rPr>
               <a:t>•  Where my compost goes</a:t>
             </a:r>
@@ -8599,9 +8599,9 @@
             <a:r>
               <a:rPr sz="3000" b="1">
                 <a:solidFill>
-                  <a:srgbClr val="20190F"/>
-                </a:solidFill>
-                <a:latin typeface="Arial"/>
+                  <a:srgbClr val="1B1A17"/>
+                </a:solidFill>
+                <a:latin typeface="Verdana"/>
               </a:rPr>
               <a:t>•  Where my first bed goes</a:t>
             </a:r>
@@ -8615,9 +8615,9 @@
             <a:r>
               <a:rPr sz="3000" b="1">
                 <a:solidFill>
-                  <a:srgbClr val="20190F"/>
-                </a:solidFill>
-                <a:latin typeface="Arial"/>
+                  <a:srgbClr val="1B1A17"/>
+                </a:solidFill>
+                <a:latin typeface="Verdana"/>
               </a:rPr>
               <a:t>•  Where my mulch comes from</a:t>
             </a:r>
@@ -8639,11 +8639,11 @@
             <a:avLst/>
           </a:prstGeom>
           <a:solidFill>
-            <a:srgbClr val="FBF6EC"/>
+            <a:srgbClr val="EFE6D2"/>
           </a:solidFill>
           <a:ln w="15875">
             <a:solidFill>
-              <a:srgbClr val="E2D8C4"/>
+              <a:srgbClr val="2F5D34"/>
             </a:solidFill>
           </a:ln>
           <a:effectLst/>
@@ -8700,9 +8700,9 @@
             <a:r>
               <a:rPr sz="1200" b="1">
                 <a:solidFill>
-                  <a:srgbClr val="C07A1E"/>
-                </a:solidFill>
-                <a:latin typeface="Arial"/>
+                  <a:srgbClr val="B24E2A"/>
+                </a:solidFill>
+                <a:latin typeface="Verdana"/>
               </a:rPr>
               <a:t>IMAGE · F-IMG-04 · coming</a:t>
             </a:r>
@@ -8739,9 +8739,9 @@
             <a:r>
               <a:rPr sz="1800" b="1">
                 <a:solidFill>
-                  <a:srgbClr val="1F4D2B"/>
-                </a:solidFill>
-                <a:latin typeface="Georgia"/>
+                  <a:srgbClr val="1B1A17"/>
+                </a:solidFill>
+                <a:latin typeface="Rockwell"/>
               </a:rPr>
               <a:t>My garden map</a:t>
             </a:r>
@@ -8778,9 +8778,9 @@
             <a:r>
               <a:rPr sz="1100" b="0">
                 <a:solidFill>
-                  <a:srgbClr val="20190F"/>
-                </a:solidFill>
-                <a:latin typeface="Arial"/>
+                  <a:srgbClr val="1B1A17"/>
+                </a:solidFill>
+                <a:latin typeface="Verdana"/>
               </a:rPr>
               <a:t>A hand-drawn map on paper seen from above: a house square, a north arrow, a tap, blue arrows of water, a sun symbol on the north side, a circle marking zone 1. Pencil and crayon style.</a:t>
             </a:r>
@@ -8801,7 +8801,7 @@
     <p:bg>
       <p:bgPr>
         <a:solidFill>
-          <a:srgbClr val="F7F2E9"/>
+          <a:srgbClr val="EFE6D2"/>
         </a:solidFill>
         <a:effectLst/>
       </p:bgPr>
@@ -8843,9 +8843,9 @@
             <a:r>
               <a:rPr sz="1000" b="0">
                 <a:solidFill>
-                  <a:srgbClr val="6B6255"/>
-                </a:solidFill>
-                <a:latin typeface="Arial"/>
+                  <a:srgbClr val="1B1A17"/>
+                </a:solidFill>
+                <a:latin typeface="Verdana"/>
               </a:rPr>
               <a:t>F-D3-18</a:t>
             </a:r>
@@ -8882,9 +8882,9 @@
             <a:r>
               <a:rPr sz="1000" b="0">
                 <a:solidFill>
-                  <a:srgbClr val="6B6255"/>
-                </a:solidFill>
-                <a:latin typeface="Arial"/>
+                  <a:srgbClr val="1B1A17"/>
+                </a:solidFill>
+                <a:latin typeface="Verdana"/>
               </a:rPr>
               <a:t>Grow Food, Grow Strong</a:t>
             </a:r>
@@ -8921,9 +8921,9 @@
             <a:r>
               <a:rPr sz="3800" b="1">
                 <a:solidFill>
-                  <a:srgbClr val="1F4D2B"/>
-                </a:solidFill>
-                <a:latin typeface="Georgia"/>
+                  <a:srgbClr val="1B1A17"/>
+                </a:solidFill>
+                <a:latin typeface="Rockwell"/>
               </a:rPr>
               <a:t>Tonight</a:t>
             </a:r>
@@ -8945,7 +8945,7 @@
             <a:avLst/>
           </a:prstGeom>
           <a:solidFill>
-            <a:srgbClr val="E2D8C4"/>
+            <a:srgbClr val="2F5D34"/>
           </a:solidFill>
           <a:ln>
             <a:noFill/>
@@ -9004,9 +9004,9 @@
             <a:r>
               <a:rPr sz="2400" b="0">
                 <a:solidFill>
-                  <a:srgbClr val="20190F"/>
-                </a:solidFill>
-                <a:latin typeface="Arial"/>
+                  <a:srgbClr val="1B1A17"/>
+                </a:solidFill>
+                <a:latin typeface="Verdana"/>
               </a:rPr>
               <a:t>•  Start a compost pile at home</a:t>
             </a:r>
@@ -9020,9 +9020,9 @@
             <a:r>
               <a:rPr sz="2400" b="0">
                 <a:solidFill>
-                  <a:srgbClr val="20190F"/>
-                </a:solidFill>
-                <a:latin typeface="Arial"/>
+                  <a:srgbClr val="1B1A17"/>
+                </a:solidFill>
+                <a:latin typeface="Verdana"/>
               </a:rPr>
               <a:t>•  Bring containers for seedlings tomorrow</a:t>
             </a:r>
@@ -9044,11 +9044,11 @@
             <a:avLst/>
           </a:prstGeom>
           <a:solidFill>
-            <a:srgbClr val="FBF6EC"/>
+            <a:srgbClr val="EFE6D2"/>
           </a:solidFill>
           <a:ln w="15875">
             <a:solidFill>
-              <a:srgbClr val="E2D8C4"/>
+              <a:srgbClr val="2F5D34"/>
             </a:solidFill>
           </a:ln>
           <a:effectLst/>
@@ -9105,9 +9105,9 @@
             <a:r>
               <a:rPr sz="1200" b="1">
                 <a:solidFill>
-                  <a:srgbClr val="C07A1E"/>
-                </a:solidFill>
-                <a:latin typeface="Arial"/>
+                  <a:srgbClr val="B24E2A"/>
+                </a:solidFill>
+                <a:latin typeface="Verdana"/>
               </a:rPr>
               <a:t>IMAGE · F-IMG-05 · coming</a:t>
             </a:r>
@@ -9144,9 +9144,9 @@
             <a:r>
               <a:rPr sz="1800" b="1">
                 <a:solidFill>
-                  <a:srgbClr val="1F4D2B"/>
-                </a:solidFill>
-                <a:latin typeface="Georgia"/>
+                  <a:srgbClr val="1B1A17"/>
+                </a:solidFill>
+                <a:latin typeface="Rockwell"/>
               </a:rPr>
               <a:t>Closing circle</a:t>
             </a:r>
@@ -9183,9 +9183,9 @@
             <a:r>
               <a:rPr sz="1100" b="0">
                 <a:solidFill>
-                  <a:srgbClr val="20190F"/>
-                </a:solidFill>
-                <a:latin typeface="Arial"/>
+                  <a:srgbClr val="1B1A17"/>
+                </a:solidFill>
+                <a:latin typeface="Verdana"/>
               </a:rPr>
               <a:t>Late-afternoon warm light; a circle of standing people, one holding up a hand to speak; tools laid neatly on a tarp in the centre.</a:t>
             </a:r>
@@ -9206,7 +9206,7 @@
     <p:bg>
       <p:bgPr>
         <a:solidFill>
-          <a:srgbClr val="F7F2E9"/>
+          <a:srgbClr val="EFE6D2"/>
         </a:solidFill>
         <a:effectLst/>
       </p:bgPr>
@@ -9248,9 +9248,9 @@
             <a:r>
               <a:rPr sz="1000" b="0">
                 <a:solidFill>
-                  <a:srgbClr val="6B6255"/>
-                </a:solidFill>
-                <a:latin typeface="Arial"/>
+                  <a:srgbClr val="1B1A17"/>
+                </a:solidFill>
+                <a:latin typeface="Verdana"/>
               </a:rPr>
               <a:t>F-D3-02   ·   Poster F-P10</a:t>
             </a:r>
@@ -9287,9 +9287,9 @@
             <a:r>
               <a:rPr sz="1000" b="0">
                 <a:solidFill>
-                  <a:srgbClr val="6B6255"/>
-                </a:solidFill>
-                <a:latin typeface="Arial"/>
+                  <a:srgbClr val="1B1A17"/>
+                </a:solidFill>
+                <a:latin typeface="Verdana"/>
               </a:rPr>
               <a:t>Grow Food, Grow Strong</a:t>
             </a:r>
@@ -9326,9 +9326,9 @@
             <a:r>
               <a:rPr sz="3800" b="1">
                 <a:solidFill>
-                  <a:srgbClr val="1F4D2B"/>
-                </a:solidFill>
-                <a:latin typeface="Georgia"/>
+                  <a:srgbClr val="1B1A17"/>
+                </a:solidFill>
+                <a:latin typeface="Rockwell"/>
               </a:rPr>
               <a:t>Alive or dead?</a:t>
             </a:r>
@@ -9350,7 +9350,7 @@
             <a:avLst/>
           </a:prstGeom>
           <a:solidFill>
-            <a:srgbClr val="E2D8C4"/>
+            <a:srgbClr val="2F5D34"/>
           </a:solidFill>
           <a:ln>
             <a:noFill/>
@@ -9409,9 +9409,9 @@
             <a:r>
               <a:rPr sz="2400" b="0">
                 <a:solidFill>
-                  <a:srgbClr val="20190F"/>
-                </a:solidFill>
-                <a:latin typeface="Arial"/>
+                  <a:srgbClr val="1B1A17"/>
+                </a:solidFill>
+                <a:latin typeface="Verdana"/>
               </a:rPr>
               <a:t>•  Smell · colour · crumbs · roots · worms</a:t>
             </a:r>
@@ -9457,7 +9457,7 @@
             <a:avLst/>
           </a:prstGeom>
           <a:solidFill>
-            <a:srgbClr val="20190F"/>
+            <a:srgbClr val="1B1A17"/>
           </a:solidFill>
           <a:ln>
             <a:noFill/>
@@ -9516,9 +9516,9 @@
             <a:r>
               <a:rPr sz="1100" b="0">
                 <a:solidFill>
-                  <a:srgbClr val="F7F2E9"/>
-                </a:solidFill>
-                <a:latin typeface="Arial"/>
+                  <a:srgbClr val="EFE6D2"/>
+                </a:solidFill>
+                <a:latin typeface="Verdana"/>
               </a:rPr>
               <a:t>▶  Clip F-ANI-13 · play from the tablet: watch-05-living-soil.mp4</a:t>
             </a:r>
@@ -9539,7 +9539,7 @@
     <p:bg>
       <p:bgPr>
         <a:solidFill>
-          <a:srgbClr val="F7F2E9"/>
+          <a:srgbClr val="EFE6D2"/>
         </a:solidFill>
         <a:effectLst/>
       </p:bgPr>
@@ -9581,9 +9581,9 @@
             <a:r>
               <a:rPr sz="1000" b="0">
                 <a:solidFill>
-                  <a:srgbClr val="6B6255"/>
-                </a:solidFill>
-                <a:latin typeface="Arial"/>
+                  <a:srgbClr val="1B1A17"/>
+                </a:solidFill>
+                <a:latin typeface="Verdana"/>
               </a:rPr>
               <a:t>F-D3-03   ·   Poster F-P10</a:t>
             </a:r>
@@ -9620,9 +9620,9 @@
             <a:r>
               <a:rPr sz="1000" b="0">
                 <a:solidFill>
-                  <a:srgbClr val="6B6255"/>
-                </a:solidFill>
-                <a:latin typeface="Arial"/>
+                  <a:srgbClr val="1B1A17"/>
+                </a:solidFill>
+                <a:latin typeface="Verdana"/>
               </a:rPr>
               <a:t>Grow Food, Grow Strong</a:t>
             </a:r>
@@ -9659,9 +9659,9 @@
             <a:r>
               <a:rPr sz="3800" b="1">
                 <a:solidFill>
-                  <a:srgbClr val="1F4D2B"/>
-                </a:solidFill>
-                <a:latin typeface="Georgia"/>
+                  <a:srgbClr val="1B1A17"/>
+                </a:solidFill>
+                <a:latin typeface="Rockwell"/>
               </a:rPr>
               <a:t>What lives in soil</a:t>
             </a:r>
@@ -9683,7 +9683,7 @@
             <a:avLst/>
           </a:prstGeom>
           <a:solidFill>
-            <a:srgbClr val="E2D8C4"/>
+            <a:srgbClr val="2F5D34"/>
           </a:solidFill>
           <a:ln>
             <a:noFill/>
@@ -9742,9 +9742,9 @@
             <a:r>
               <a:rPr sz="2400" b="0">
                 <a:solidFill>
-                  <a:srgbClr val="20190F"/>
-                </a:solidFill>
-                <a:latin typeface="Arial"/>
+                  <a:srgbClr val="1B1A17"/>
+                </a:solidFill>
+                <a:latin typeface="Verdana"/>
               </a:rPr>
               <a:t>•  Worms, beetles, fungi, bacteria</a:t>
             </a:r>
@@ -9758,9 +9758,9 @@
             <a:r>
               <a:rPr sz="2400" b="0">
                 <a:solidFill>
-                  <a:srgbClr val="20190F"/>
-                </a:solidFill>
-                <a:latin typeface="Arial"/>
+                  <a:srgbClr val="1B1A17"/>
+                </a:solidFill>
+                <a:latin typeface="Verdana"/>
               </a:rPr>
               <a:t>•  They turn dead plants into plant food</a:t>
             </a:r>
@@ -9782,11 +9782,11 @@
             <a:avLst/>
           </a:prstGeom>
           <a:solidFill>
-            <a:srgbClr val="FBF6EC"/>
+            <a:srgbClr val="EFE6D2"/>
           </a:solidFill>
           <a:ln w="15875">
             <a:solidFill>
-              <a:srgbClr val="E2D8C4"/>
+              <a:srgbClr val="2F5D34"/>
             </a:solidFill>
           </a:ln>
           <a:effectLst/>
@@ -9843,9 +9843,9 @@
             <a:r>
               <a:rPr sz="1200" b="1">
                 <a:solidFill>
-                  <a:srgbClr val="C07A1E"/>
-                </a:solidFill>
-                <a:latin typeface="Arial"/>
+                  <a:srgbClr val="B24E2A"/>
+                </a:solidFill>
+                <a:latin typeface="Verdana"/>
               </a:rPr>
               <a:t>POSTER ART · F-P10-ART · coming</a:t>
             </a:r>
@@ -9882,9 +9882,9 @@
             <a:r>
               <a:rPr sz="1800" b="1">
                 <a:solidFill>
-                  <a:srgbClr val="1F4D2B"/>
-                </a:solidFill>
-                <a:latin typeface="Georgia"/>
+                  <a:srgbClr val="1B1A17"/>
+                </a:solidFill>
+                <a:latin typeface="Rockwell"/>
               </a:rPr>
               <a:t>Artwork for F-P10 · Soil is alive</a:t>
             </a:r>
@@ -9921,9 +9921,9 @@
             <a:r>
               <a:rPr sz="1100" b="0">
                 <a:solidFill>
-                  <a:srgbClr val="20190F"/>
-                </a:solidFill>
-                <a:latin typeface="Arial"/>
+                  <a:srgbClr val="1B1A17"/>
+                </a:solidFill>
+                <a:latin typeface="Verdana"/>
               </a:rPr>
               <a:t>Top 55%: a cut-away of soil under a mulched vegetable, magnified: earthworms, a beetle, white fungus threads wrapped around roots, dark crumbs with air gaps, water droplets held in the crumbs, tiny dots for microbes. Bottom 45%: four small panels for the hand tests — (a) a hand squeezing a ball of soil, three results: falls apart / ball that crumbles /…</a:t>
             </a:r>
@@ -9944,7 +9944,7 @@
     <p:bg>
       <p:bgPr>
         <a:solidFill>
-          <a:srgbClr val="F7F2E9"/>
+          <a:srgbClr val="EFE6D2"/>
         </a:solidFill>
         <a:effectLst/>
       </p:bgPr>
@@ -9986,9 +9986,9 @@
             <a:r>
               <a:rPr sz="1000" b="0">
                 <a:solidFill>
-                  <a:srgbClr val="6B6255"/>
-                </a:solidFill>
-                <a:latin typeface="Arial"/>
+                  <a:srgbClr val="1B1A17"/>
+                </a:solidFill>
+                <a:latin typeface="Verdana"/>
               </a:rPr>
               <a:t>F-D3-04   ·   Poster F-P10</a:t>
             </a:r>
@@ -10025,9 +10025,9 @@
             <a:r>
               <a:rPr sz="1000" b="0">
                 <a:solidFill>
-                  <a:srgbClr val="6B6255"/>
-                </a:solidFill>
-                <a:latin typeface="Arial"/>
+                  <a:srgbClr val="1B1A17"/>
+                </a:solidFill>
+                <a:latin typeface="Verdana"/>
               </a:rPr>
               <a:t>Grow Food, Grow Strong</a:t>
             </a:r>
@@ -10049,7 +10049,7 @@
             <a:avLst/>
           </a:prstGeom>
           <a:solidFill>
-            <a:srgbClr val="C07A1E"/>
+            <a:srgbClr val="B24E2A"/>
           </a:solidFill>
           <a:ln>
             <a:noFill/>
@@ -10108,9 +10108,9 @@
             <a:r>
               <a:rPr sz="1400" b="1">
                 <a:solidFill>
-                  <a:srgbClr val="F7F2E9"/>
-                </a:solidFill>
-                <a:latin typeface="Arial"/>
+                  <a:srgbClr val="EFE6D2"/>
+                </a:solidFill>
+                <a:latin typeface="Verdana"/>
               </a:rPr>
               <a:t>YOUR TURN</a:t>
             </a:r>
@@ -10147,9 +10147,9 @@
             <a:r>
               <a:rPr sz="3800" b="1">
                 <a:solidFill>
-                  <a:srgbClr val="1F4D2B"/>
-                </a:solidFill>
-                <a:latin typeface="Georgia"/>
+                  <a:srgbClr val="1B1A17"/>
+                </a:solidFill>
+                <a:latin typeface="Rockwell"/>
               </a:rPr>
               <a:t>Four tests</a:t>
             </a:r>
@@ -10171,7 +10171,7 @@
             <a:avLst/>
           </a:prstGeom>
           <a:solidFill>
-            <a:srgbClr val="E2D8C4"/>
+            <a:srgbClr val="2F5D34"/>
           </a:solidFill>
           <a:ln>
             <a:noFill/>
@@ -10230,9 +10230,9 @@
             <a:r>
               <a:rPr sz="2600" b="1">
                 <a:solidFill>
-                  <a:srgbClr val="20190F"/>
-                </a:solidFill>
-                <a:latin typeface="Arial"/>
+                  <a:srgbClr val="1B1A17"/>
+                </a:solidFill>
+                <a:latin typeface="Verdana"/>
               </a:rPr>
               <a:t>•  Squeeze · Jar · Smell &amp; look · Worms</a:t>
             </a:r>
@@ -10246,9 +10246,9 @@
             <a:r>
               <a:rPr sz="2600" b="1">
                 <a:solidFill>
-                  <a:srgbClr val="20190F"/>
-                </a:solidFill>
-                <a:latin typeface="Arial"/>
+                  <a:srgbClr val="1B1A17"/>
+                </a:solidFill>
+                <a:latin typeface="Verdana"/>
               </a:rPr>
               <a:t>•  7 minutes each</a:t>
             </a:r>
@@ -10294,7 +10294,7 @@
             <a:avLst/>
           </a:prstGeom>
           <a:solidFill>
-            <a:srgbClr val="20190F"/>
+            <a:srgbClr val="1B1A17"/>
           </a:solidFill>
           <a:ln>
             <a:noFill/>
@@ -10353,9 +10353,9 @@
             <a:r>
               <a:rPr sz="1100" b="0">
                 <a:solidFill>
-                  <a:srgbClr val="F7F2E9"/>
-                </a:solidFill>
-                <a:latin typeface="Arial"/>
+                  <a:srgbClr val="EFE6D2"/>
+                </a:solidFill>
+                <a:latin typeface="Verdana"/>
               </a:rPr>
               <a:t>▶  Clip F-ANI-14 · play from the tablet: tour-soil-observation.mp4</a:t>
             </a:r>
@@ -10376,7 +10376,7 @@
     <p:bg>
       <p:bgPr>
         <a:solidFill>
-          <a:srgbClr val="F7F2E9"/>
+          <a:srgbClr val="EFE6D2"/>
         </a:solidFill>
         <a:effectLst/>
       </p:bgPr>
@@ -10418,9 +10418,9 @@
             <a:r>
               <a:rPr sz="1000" b="0">
                 <a:solidFill>
-                  <a:srgbClr val="6B6255"/>
-                </a:solidFill>
-                <a:latin typeface="Arial"/>
+                  <a:srgbClr val="1B1A17"/>
+                </a:solidFill>
+                <a:latin typeface="Verdana"/>
               </a:rPr>
               <a:t>F-D3-05</a:t>
             </a:r>
@@ -10457,9 +10457,9 @@
             <a:r>
               <a:rPr sz="1000" b="0">
                 <a:solidFill>
-                  <a:srgbClr val="6B6255"/>
-                </a:solidFill>
-                <a:latin typeface="Arial"/>
+                  <a:srgbClr val="1B1A17"/>
+                </a:solidFill>
+                <a:latin typeface="Verdana"/>
               </a:rPr>
               <a:t>Grow Food, Grow Strong</a:t>
             </a:r>
@@ -10496,9 +10496,9 @@
             <a:r>
               <a:rPr sz="3800" b="1">
                 <a:solidFill>
-                  <a:srgbClr val="1F4D2B"/>
-                </a:solidFill>
-                <a:latin typeface="Georgia"/>
+                  <a:srgbClr val="1B1A17"/>
+                </a:solidFill>
+                <a:latin typeface="Rockwell"/>
               </a:rPr>
               <a:t>What does our soil need?</a:t>
             </a:r>
@@ -10520,7 +10520,7 @@
             <a:avLst/>
           </a:prstGeom>
           <a:solidFill>
-            <a:srgbClr val="E2D8C4"/>
+            <a:srgbClr val="2F5D34"/>
           </a:solidFill>
           <a:ln>
             <a:noFill/>
@@ -10579,9 +10579,9 @@
             <a:r>
               <a:rPr sz="2400" b="0">
                 <a:solidFill>
-                  <a:srgbClr val="20190F"/>
-                </a:solidFill>
-                <a:latin typeface="Arial"/>
+                  <a:srgbClr val="1B1A17"/>
+                </a:solidFill>
+                <a:latin typeface="Verdana"/>
               </a:rPr>
               <a:t>•  Sandy or clay — the same answer</a:t>
             </a:r>
@@ -10595,9 +10595,9 @@
             <a:r>
               <a:rPr sz="2400" b="0">
                 <a:solidFill>
-                  <a:srgbClr val="20190F"/>
-                </a:solidFill>
-                <a:latin typeface="Arial"/>
+                  <a:srgbClr val="1B1A17"/>
+                </a:solidFill>
+                <a:latin typeface="Verdana"/>
               </a:rPr>
               <a:t>•  Organic matter</a:t>
             </a:r>
@@ -10619,11 +10619,11 @@
             <a:avLst/>
           </a:prstGeom>
           <a:solidFill>
-            <a:srgbClr val="FBF6EC"/>
+            <a:srgbClr val="EFE6D2"/>
           </a:solidFill>
           <a:ln w="15875">
             <a:solidFill>
-              <a:srgbClr val="E2D8C4"/>
+              <a:srgbClr val="2F5D34"/>
             </a:solidFill>
           </a:ln>
           <a:effectLst/>
@@ -10680,9 +10680,9 @@
             <a:r>
               <a:rPr sz="1200" b="1">
                 <a:solidFill>
-                  <a:srgbClr val="C07A1E"/>
-                </a:solidFill>
-                <a:latin typeface="Arial"/>
+                  <a:srgbClr val="B24E2A"/>
+                </a:solidFill>
+                <a:latin typeface="Verdana"/>
               </a:rPr>
               <a:t>IMAGE · F-IMG-15 · coming</a:t>
             </a:r>
@@ -10719,9 +10719,9 @@
             <a:r>
               <a:rPr sz="1800" b="1">
                 <a:solidFill>
-                  <a:srgbClr val="1F4D2B"/>
-                </a:solidFill>
-                <a:latin typeface="Georgia"/>
+                  <a:srgbClr val="1B1A17"/>
+                </a:solidFill>
+                <a:latin typeface="Rockwell"/>
               </a:rPr>
               <a:t>Organic matter answer</a:t>
             </a:r>
@@ -10758,9 +10758,9 @@
             <a:r>
               <a:rPr sz="1100" b="0">
                 <a:solidFill>
-                  <a:srgbClr val="20190F"/>
-                </a:solidFill>
-                <a:latin typeface="Arial"/>
+                  <a:srgbClr val="1B1A17"/>
+                </a:solidFill>
+                <a:latin typeface="Verdana"/>
               </a:rPr>
               <a:t>Split: sandy soil (loose pale grains) and clay soil (cracked plates) each receiving the same handful of dark compost from above.</a:t>
             </a:r>
@@ -10781,7 +10781,7 @@
     <p:bg>
       <p:bgPr>
         <a:solidFill>
-          <a:srgbClr val="F7F2E9"/>
+          <a:srgbClr val="EFE6D2"/>
         </a:solidFill>
         <a:effectLst/>
       </p:bgPr>
@@ -10823,9 +10823,9 @@
             <a:r>
               <a:rPr sz="1000" b="0">
                 <a:solidFill>
-                  <a:srgbClr val="6B6255"/>
-                </a:solidFill>
-                <a:latin typeface="Arial"/>
+                  <a:srgbClr val="1B1A17"/>
+                </a:solidFill>
+                <a:latin typeface="Verdana"/>
               </a:rPr>
               <a:t>F-D3-06   ·   Poster F-P13</a:t>
             </a:r>
@@ -10862,9 +10862,9 @@
             <a:r>
               <a:rPr sz="1000" b="0">
                 <a:solidFill>
-                  <a:srgbClr val="6B6255"/>
-                </a:solidFill>
-                <a:latin typeface="Arial"/>
+                  <a:srgbClr val="1B1A17"/>
+                </a:solidFill>
+                <a:latin typeface="Verdana"/>
               </a:rPr>
               <a:t>Grow Food, Grow Strong</a:t>
             </a:r>
@@ -10901,9 +10901,9 @@
             <a:r>
               <a:rPr sz="3800" b="1">
                 <a:solidFill>
-                  <a:srgbClr val="1F4D2B"/>
-                </a:solidFill>
-                <a:latin typeface="Georgia"/>
+                  <a:srgbClr val="1B1A17"/>
+                </a:solidFill>
+                <a:latin typeface="Rockwell"/>
               </a:rPr>
               <a:t>Dig once, feed for years</a:t>
             </a:r>
@@ -10925,7 +10925,7 @@
             <a:avLst/>
           </a:prstGeom>
           <a:solidFill>
-            <a:srgbClr val="E2D8C4"/>
+            <a:srgbClr val="2F5D34"/>
           </a:solidFill>
           <a:ln>
             <a:noFill/>
@@ -10984,9 +10984,9 @@
             <a:r>
               <a:rPr sz="2800" b="0">
                 <a:solidFill>
-                  <a:srgbClr val="20190F"/>
-                </a:solidFill>
-                <a:latin typeface="Arial"/>
+                  <a:srgbClr val="1B1A17"/>
+                </a:solidFill>
+                <a:latin typeface="Verdana"/>
               </a:rPr>
               <a:t>•  1 m wide — never step in</a:t>
             </a:r>
@@ -11000,9 +11000,9 @@
             <a:r>
               <a:rPr sz="2800" b="0">
                 <a:solidFill>
-                  <a:srgbClr val="20190F"/>
-                </a:solidFill>
-                <a:latin typeface="Arial"/>
+                  <a:srgbClr val="1B1A17"/>
+                </a:solidFill>
+                <a:latin typeface="Verdana"/>
               </a:rPr>
               <a:t>•  50–60 cm deep</a:t>
             </a:r>
@@ -11016,9 +11016,9 @@
             <a:r>
               <a:rPr sz="2800" b="0">
                 <a:solidFill>
-                  <a:srgbClr val="20190F"/>
-                </a:solidFill>
-                <a:latin typeface="Arial"/>
+                  <a:srgbClr val="1B1A17"/>
+                </a:solidFill>
+                <a:latin typeface="Verdana"/>
               </a:rPr>
               <a:t>•  Layers like a sandwich</a:t>
             </a:r>
@@ -11040,11 +11040,11 @@
             <a:avLst/>
           </a:prstGeom>
           <a:solidFill>
-            <a:srgbClr val="FBF6EC"/>
+            <a:srgbClr val="EFE6D2"/>
           </a:solidFill>
           <a:ln w="15875">
             <a:solidFill>
-              <a:srgbClr val="E2D8C4"/>
+              <a:srgbClr val="2F5D34"/>
             </a:solidFill>
           </a:ln>
           <a:effectLst/>
@@ -11101,9 +11101,9 @@
             <a:r>
               <a:rPr sz="1200" b="1">
                 <a:solidFill>
-                  <a:srgbClr val="C07A1E"/>
-                </a:solidFill>
-                <a:latin typeface="Arial"/>
+                  <a:srgbClr val="B24E2A"/>
+                </a:solidFill>
+                <a:latin typeface="Verdana"/>
               </a:rPr>
               <a:t>POSTER ART · F-P13-ART · coming</a:t>
             </a:r>
@@ -11140,9 +11140,9 @@
             <a:r>
               <a:rPr sz="1800" b="1">
                 <a:solidFill>
-                  <a:srgbClr val="1F4D2B"/>
-                </a:solidFill>
-                <a:latin typeface="Georgia"/>
+                  <a:srgbClr val="1B1A17"/>
+                </a:solidFill>
+                <a:latin typeface="Rockwell"/>
               </a:rPr>
               <a:t>Artwork for F-P13 · Beds that hold water</a:t>
             </a:r>
@@ -11179,9 +11179,9 @@
             <a:r>
               <a:rPr sz="1100" b="0">
                 <a:solidFill>
-                  <a:srgbClr val="20190F"/>
-                </a:solidFill>
-                <a:latin typeface="Arial"/>
+                  <a:srgbClr val="1B1A17"/>
+                </a:solidFill>
+                <a:latin typeface="Verdana"/>
               </a:rPr>
               <a:t>Top 60%: a cut-away trench bed 1 m wide in the ground with a gogo reaching to the middle from one side and a young man from the other (arms showing the reach). Layers visible like a sandwich: sticks and cardboard at the bottom, manure, green, dry grass, soil — repeated — topsoil with young plants on top, mulch, and a small lip at the edges holding water.…</a:t>
             </a:r>
@@ -11202,7 +11202,7 @@
     <p:bg>
       <p:bgPr>
         <a:solidFill>
-          <a:srgbClr val="F7F2E9"/>
+          <a:srgbClr val="EFE6D2"/>
         </a:solidFill>
         <a:effectLst/>
       </p:bgPr>
@@ -11244,9 +11244,9 @@
             <a:r>
               <a:rPr sz="1000" b="0">
                 <a:solidFill>
-                  <a:srgbClr val="6B6255"/>
-                </a:solidFill>
-                <a:latin typeface="Arial"/>
+                  <a:srgbClr val="1B1A17"/>
+                </a:solidFill>
+                <a:latin typeface="Verdana"/>
               </a:rPr>
               <a:t>F-D3-07</a:t>
             </a:r>
@@ -11283,9 +11283,9 @@
             <a:r>
               <a:rPr sz="1000" b="0">
                 <a:solidFill>
-                  <a:srgbClr val="6B6255"/>
-                </a:solidFill>
-                <a:latin typeface="Arial"/>
+                  <a:srgbClr val="1B1A17"/>
+                </a:solidFill>
+                <a:latin typeface="Verdana"/>
               </a:rPr>
               <a:t>Grow Food, Grow Strong</a:t>
             </a:r>
@@ -11307,7 +11307,7 @@
             <a:avLst/>
           </a:prstGeom>
           <a:solidFill>
-            <a:srgbClr val="C07A1E"/>
+            <a:srgbClr val="B24E2A"/>
           </a:solidFill>
           <a:ln>
             <a:noFill/>
@@ -11366,9 +11366,9 @@
             <a:r>
               <a:rPr sz="1400" b="1">
                 <a:solidFill>
-                  <a:srgbClr val="F7F2E9"/>
-                </a:solidFill>
-                <a:latin typeface="Arial"/>
+                  <a:srgbClr val="EFE6D2"/>
+                </a:solidFill>
+                <a:latin typeface="Verdana"/>
               </a:rPr>
               <a:t>YOUR TURN</a:t>
             </a:r>
@@ -11405,9 +11405,9 @@
             <a:r>
               <a:rPr sz="3800" b="1">
                 <a:solidFill>
-                  <a:srgbClr val="1F4D2B"/>
-                </a:solidFill>
-                <a:latin typeface="Georgia"/>
+                  <a:srgbClr val="1B1A17"/>
+                </a:solidFill>
+                <a:latin typeface="Rockwell"/>
               </a:rPr>
               <a:t>Dig</a:t>
             </a:r>
@@ -11429,7 +11429,7 @@
             <a:avLst/>
           </a:prstGeom>
           <a:solidFill>
-            <a:srgbClr val="E2D8C4"/>
+            <a:srgbClr val="2F5D34"/>
           </a:solidFill>
           <a:ln>
             <a:noFill/>
@@ -11488,9 +11488,9 @@
             <a:r>
               <a:rPr sz="2600" b="1">
                 <a:solidFill>
-                  <a:srgbClr val="20190F"/>
-                </a:solidFill>
-                <a:latin typeface="Arial"/>
+                  <a:srgbClr val="1B1A17"/>
+                </a:solidFill>
+                <a:latin typeface="Verdana"/>
               </a:rPr>
               <a:t>•  Peg 1 m × 2 m</a:t>
             </a:r>
@@ -11504,9 +11504,9 @@
             <a:r>
               <a:rPr sz="2600" b="1">
                 <a:solidFill>
-                  <a:srgbClr val="20190F"/>
-                </a:solidFill>
-                <a:latin typeface="Arial"/>
+                  <a:srgbClr val="1B1A17"/>
+                </a:solidFill>
+                <a:latin typeface="Verdana"/>
               </a:rPr>
               <a:t>•  Topsoil one side, subsoil the other</a:t>
             </a:r>
@@ -11520,9 +11520,9 @@
             <a:r>
               <a:rPr sz="2600" b="1">
                 <a:solidFill>
-                  <a:srgbClr val="20190F"/>
-                </a:solidFill>
-                <a:latin typeface="Arial"/>
+                  <a:srgbClr val="1B1A17"/>
+                </a:solidFill>
+                <a:latin typeface="Verdana"/>
               </a:rPr>
               <a:t>•  Swap every 10 minutes</a:t>
             </a:r>
@@ -11544,11 +11544,11 @@
             <a:avLst/>
           </a:prstGeom>
           <a:solidFill>
-            <a:srgbClr val="FBF6EC"/>
+            <a:srgbClr val="EFE6D2"/>
           </a:solidFill>
           <a:ln w="15875">
             <a:solidFill>
-              <a:srgbClr val="E2D8C4"/>
+              <a:srgbClr val="2F5D34"/>
             </a:solidFill>
           </a:ln>
           <a:effectLst/>
@@ -11605,9 +11605,9 @@
             <a:r>
               <a:rPr sz="1200" b="1">
                 <a:solidFill>
-                  <a:srgbClr val="C07A1E"/>
-                </a:solidFill>
-                <a:latin typeface="Arial"/>
+                  <a:srgbClr val="B24E2A"/>
+                </a:solidFill>
+                <a:latin typeface="Verdana"/>
               </a:rPr>
               <a:t>IMAGE · F-IMG-16 · coming</a:t>
             </a:r>
@@ -11644,9 +11644,9 @@
             <a:r>
               <a:rPr sz="1800" b="1">
                 <a:solidFill>
-                  <a:srgbClr val="1F4D2B"/>
-                </a:solidFill>
-                <a:latin typeface="Georgia"/>
+                  <a:srgbClr val="1B1A17"/>
+                </a:solidFill>
+                <a:latin typeface="Rockwell"/>
               </a:rPr>
               <a:t>Digging a trench bed</a:t>
             </a:r>
@@ -11683,9 +11683,9 @@
             <a:r>
               <a:rPr sz="1100" b="0">
                 <a:solidFill>
-                  <a:srgbClr val="20190F"/>
-                </a:solidFill>
-                <a:latin typeface="Arial"/>
+                  <a:srgbClr val="1B1A17"/>
+                </a:solidFill>
+                <a:latin typeface="Verdana"/>
               </a:rPr>
               <a:t>A 1 m × 2 m pegged rectangle being dug by two people; pale subsoil on one side, dark topsoil on the other; others waiting with a wheelbarrow of dry grass.</a:t>
             </a:r>
@@ -11706,7 +11706,7 @@
     <p:bg>
       <p:bgPr>
         <a:solidFill>
-          <a:srgbClr val="F7F2E9"/>
+          <a:srgbClr val="EFE6D2"/>
         </a:solidFill>
         <a:effectLst/>
       </p:bgPr>
@@ -11748,9 +11748,9 @@
             <a:r>
               <a:rPr sz="1000" b="0">
                 <a:solidFill>
-                  <a:srgbClr val="6B6255"/>
-                </a:solidFill>
-                <a:latin typeface="Arial"/>
+                  <a:srgbClr val="1B1A17"/>
+                </a:solidFill>
+                <a:latin typeface="Verdana"/>
               </a:rPr>
               <a:t>F-D3-08   ·   Poster F-P13</a:t>
             </a:r>
@@ -11787,9 +11787,9 @@
             <a:r>
               <a:rPr sz="1000" b="0">
                 <a:solidFill>
-                  <a:srgbClr val="6B6255"/>
-                </a:solidFill>
-                <a:latin typeface="Arial"/>
+                  <a:srgbClr val="1B1A17"/>
+                </a:solidFill>
+                <a:latin typeface="Verdana"/>
               </a:rPr>
               <a:t>Grow Food, Grow Strong</a:t>
             </a:r>
@@ -11811,7 +11811,7 @@
             <a:avLst/>
           </a:prstGeom>
           <a:solidFill>
-            <a:srgbClr val="C07A1E"/>
+            <a:srgbClr val="B24E2A"/>
           </a:solidFill>
           <a:ln>
             <a:noFill/>
@@ -11870,9 +11870,9 @@
             <a:r>
               <a:rPr sz="1400" b="1">
                 <a:solidFill>
-                  <a:srgbClr val="F7F2E9"/>
-                </a:solidFill>
-                <a:latin typeface="Arial"/>
+                  <a:srgbClr val="EFE6D2"/>
+                </a:solidFill>
+                <a:latin typeface="Verdana"/>
               </a:rPr>
               <a:t>YOUR TURN</a:t>
             </a:r>
@@ -11909,9 +11909,9 @@
             <a:r>
               <a:rPr sz="3800" b="1">
                 <a:solidFill>
-                  <a:srgbClr val="1F4D2B"/>
-                </a:solidFill>
-                <a:latin typeface="Georgia"/>
+                  <a:srgbClr val="1B1A17"/>
+                </a:solidFill>
+                <a:latin typeface="Rockwell"/>
               </a:rPr>
               <a:t>Layer</a:t>
             </a:r>
@@ -11933,7 +11933,7 @@
             <a:avLst/>
           </a:prstGeom>
           <a:solidFill>
-            <a:srgbClr val="E2D8C4"/>
+            <a:srgbClr val="2F5D34"/>
           </a:solidFill>
           <a:ln>
             <a:noFill/>
@@ -11992,9 +11992,9 @@
             <a:r>
               <a:rPr sz="2600" b="1">
                 <a:solidFill>
-                  <a:srgbClr val="20190F"/>
-                </a:solidFill>
-                <a:latin typeface="Arial"/>
+                  <a:srgbClr val="1B1A17"/>
+                </a:solidFill>
+                <a:latin typeface="Verdana"/>
               </a:rPr>
               <a:t>•  Coarse → manure → green → dry → soil</a:t>
             </a:r>
@@ -12008,9 +12008,9 @@
             <a:r>
               <a:rPr sz="2600" b="1">
                 <a:solidFill>
-                  <a:srgbClr val="20190F"/>
-                </a:solidFill>
-                <a:latin typeface="Arial"/>
+                  <a:srgbClr val="1B1A17"/>
+                </a:solidFill>
+                <a:latin typeface="Verdana"/>
               </a:rPr>
               <a:t>•  Water every layer · repeat</a:t>
             </a:r>
@@ -12024,9 +12024,9 @@
             <a:r>
               <a:rPr sz="2600" b="1">
                 <a:solidFill>
-                  <a:srgbClr val="20190F"/>
-                </a:solidFill>
-                <a:latin typeface="Arial"/>
+                  <a:srgbClr val="1B1A17"/>
+                </a:solidFill>
+                <a:latin typeface="Verdana"/>
               </a:rPr>
               <a:t>•  Subsoil in the middle, never on top</a:t>
             </a:r>
@@ -12048,11 +12048,11 @@
             <a:avLst/>
           </a:prstGeom>
           <a:solidFill>
-            <a:srgbClr val="FBF6EC"/>
+            <a:srgbClr val="EFE6D2"/>
           </a:solidFill>
           <a:ln w="15875">
             <a:solidFill>
-              <a:srgbClr val="E2D8C4"/>
+              <a:srgbClr val="2F5D34"/>
             </a:solidFill>
           </a:ln>
           <a:effectLst/>
@@ -12109,9 +12109,9 @@
             <a:r>
               <a:rPr sz="1200" b="1">
                 <a:solidFill>
-                  <a:srgbClr val="C07A1E"/>
-                </a:solidFill>
-                <a:latin typeface="Arial"/>
+                  <a:srgbClr val="B24E2A"/>
+                </a:solidFill>
+                <a:latin typeface="Verdana"/>
               </a:rPr>
               <a:t>IMAGE · F-IMG-17 · coming</a:t>
             </a:r>
@@ -12148,9 +12148,9 @@
             <a:r>
               <a:rPr sz="1800" b="1">
                 <a:solidFill>
-                  <a:srgbClr val="1F4D2B"/>
-                </a:solidFill>
-                <a:latin typeface="Georgia"/>
+                  <a:srgbClr val="1B1A17"/>
+                </a:solidFill>
+                <a:latin typeface="Rockwell"/>
               </a:rPr>
               <a:t>Trench bed layers</a:t>
             </a:r>
@@ -12187,9 +12187,9 @@
             <a:r>
               <a:rPr sz="1100" b="0">
                 <a:solidFill>
-                  <a:srgbClr val="20190F"/>
-                </a:solidFill>
-                <a:latin typeface="Arial"/>
+                  <a:srgbClr val="1B1A17"/>
+                </a:solidFill>
+                <a:latin typeface="Verdana"/>
               </a:rPr>
               <a:t>Cut-away of the trench showing sandwich layers: sticks and cardboard, manure, green leaves, dry grass, soil, repeated; a watering can over it.</a:t>
             </a:r>
@@ -12210,7 +12210,7 @@
     <p:bg>
       <p:bgPr>
         <a:solidFill>
-          <a:srgbClr val="F7F2E9"/>
+          <a:srgbClr val="EFE6D2"/>
         </a:solidFill>
         <a:effectLst/>
       </p:bgPr>
@@ -12252,9 +12252,9 @@
             <a:r>
               <a:rPr sz="1000" b="0">
                 <a:solidFill>
-                  <a:srgbClr val="6B6255"/>
-                </a:solidFill>
-                <a:latin typeface="Arial"/>
+                  <a:srgbClr val="1B1A17"/>
+                </a:solidFill>
+                <a:latin typeface="Verdana"/>
               </a:rPr>
               <a:t>F-D3-09</a:t>
             </a:r>
@@ -12291,9 +12291,9 @@
             <a:r>
               <a:rPr sz="1000" b="0">
                 <a:solidFill>
-                  <a:srgbClr val="6B6255"/>
-                </a:solidFill>
-                <a:latin typeface="Arial"/>
+                  <a:srgbClr val="1B1A17"/>
+                </a:solidFill>
+                <a:latin typeface="Verdana"/>
               </a:rPr>
               <a:t>Grow Food, Grow Strong</a:t>
             </a:r>
@@ -12330,9 +12330,9 @@
             <a:r>
               <a:rPr sz="3800" b="1">
                 <a:solidFill>
-                  <a:srgbClr val="1F4D2B"/>
-                </a:solidFill>
-                <a:latin typeface="Georgia"/>
+                  <a:srgbClr val="1B1A17"/>
+                </a:solidFill>
+                <a:latin typeface="Rockwell"/>
               </a:rPr>
               <a:t>Hard ground?</a:t>
             </a:r>
@@ -12354,7 +12354,7 @@
             <a:avLst/>
           </a:prstGeom>
           <a:solidFill>
-            <a:srgbClr val="E2D8C4"/>
+            <a:srgbClr val="2F5D34"/>
           </a:solidFill>
           <a:ln>
             <a:noFill/>
@@ -12413,9 +12413,9 @@
             <a:r>
               <a:rPr sz="2400" b="0">
                 <a:solidFill>
-                  <a:srgbClr val="20190F"/>
-                </a:solidFill>
-                <a:latin typeface="Arial"/>
+                  <a:srgbClr val="1B1A17"/>
+                </a:solidFill>
+                <a:latin typeface="Verdana"/>
               </a:rPr>
               <a:t>•  Build up, not down</a:t>
             </a:r>
@@ -12429,9 +12429,9 @@
             <a:r>
               <a:rPr sz="2400" b="0">
                 <a:solidFill>
-                  <a:srgbClr val="20190F"/>
-                </a:solidFill>
-                <a:latin typeface="Arial"/>
+                  <a:srgbClr val="1B1A17"/>
+                </a:solidFill>
+                <a:latin typeface="Verdana"/>
               </a:rPr>
               <a:t>•  Wet cardboard, then the same layers</a:t>
             </a:r>
@@ -12453,11 +12453,11 @@
             <a:avLst/>
           </a:prstGeom>
           <a:solidFill>
-            <a:srgbClr val="FBF6EC"/>
+            <a:srgbClr val="EFE6D2"/>
           </a:solidFill>
           <a:ln w="15875">
             <a:solidFill>
-              <a:srgbClr val="E2D8C4"/>
+              <a:srgbClr val="2F5D34"/>
             </a:solidFill>
           </a:ln>
           <a:effectLst/>
@@ -12514,9 +12514,9 @@
             <a:r>
               <a:rPr sz="1200" b="1">
                 <a:solidFill>
-                  <a:srgbClr val="C07A1E"/>
-                </a:solidFill>
-                <a:latin typeface="Arial"/>
+                  <a:srgbClr val="B24E2A"/>
+                </a:solidFill>
+                <a:latin typeface="Verdana"/>
               </a:rPr>
               <a:t>IMAGE · F-IMG-18 · coming</a:t>
             </a:r>
@@ -12553,9 +12553,9 @@
             <a:r>
               <a:rPr sz="1800" b="1">
                 <a:solidFill>
-                  <a:srgbClr val="1F4D2B"/>
-                </a:solidFill>
-                <a:latin typeface="Georgia"/>
+                  <a:srgbClr val="1B1A17"/>
+                </a:solidFill>
+                <a:latin typeface="Rockwell"/>
               </a:rPr>
               <a:t>No-dig raised bed</a:t>
             </a:r>
@@ -12592,9 +12592,9 @@
             <a:r>
               <a:rPr sz="1100" b="0">
                 <a:solidFill>
-                  <a:srgbClr val="20190F"/>
-                </a:solidFill>
-                <a:latin typeface="Arial"/>
+                  <a:srgbClr val="1B1A17"/>
+                </a:solidFill>
+                <a:latin typeface="Verdana"/>
               </a:rPr>
               <a:t>Wet flattened cardboard on hard ground inside a border of logs and sand-filled bottles; layers piling up above ground.</a:t>
             </a:r>

--- a/courses/build/farmer-5day/F-D3.pptx
+++ b/courses/build/farmer-5day/F-D3.pptx
@@ -686,7 +686,7 @@
           </a:p>
           <a:p>
             <a:r>
-              <a:t>Clip F-ANI-16: public/course-animations/soil-health/watch-10-compost-heap.mp4</a:t>
+              <a:t>Clip F-ANI-16: public/course-animations/soil-health/flow-build-compost-heap.mp4</a:t>
             </a:r>
           </a:p>
         </p:txBody>
@@ -1279,7 +1279,7 @@
           </a:p>
           <a:p>
             <a:r>
-              <a:t>Clip F-ANI-13: public/course-animations/soil-health/watch-05-living-soil.mp4</a:t>
+              <a:t>Clip F-ANI-13: public/course-media/farmer-5day/F-ANI-13.mp4</a:t>
             </a:r>
           </a:p>
         </p:txBody>
@@ -1436,7 +1436,7 @@
           </a:p>
           <a:p>
             <a:r>
-              <a:t>Clip F-ANI-14: public/course-animations/soil-health/tour-soil-observation.mp4</a:t>
+              <a:t>Clip F-ANI-14: public/course-media/farmer-5day/F-ANI-14.mp4</a:t>
             </a:r>
           </a:p>
         </p:txBody>
@@ -5824,7 +5824,7 @@
       </p:sp>
       <p:pic>
         <p:nvPicPr>
-          <p:cNvPr id="7" name="Picture 6" descr="watch-10-compost-heap.jpg"/>
+          <p:cNvPr id="7" name="Picture 6" descr="flow-build-compost-heap.jpg"/>
           <p:cNvPicPr>
             <a:picLocks noChangeAspect="1"/>
           </p:cNvPicPr>
@@ -5924,7 +5924,7 @@
                 </a:solidFill>
                 <a:latin typeface="Verdana"/>
               </a:rPr>
-              <a:t>▶  Clip F-ANI-16 · play from the tablet: watch-10-compost-heap.mp4</a:t>
+              <a:t>▶  Clip F-ANI-16 · play from the tablet: flow-build-compost-heap.mp4</a:t>
             </a:r>
           </a:p>
         </p:txBody>
@@ -9418,49 +9418,27 @@
           </a:p>
         </p:txBody>
       </p:sp>
-      <p:pic>
-        <p:nvPicPr>
-          <p:cNvPr id="7" name="Picture 6" descr="watch-05-living-soil.jpg"/>
-          <p:cNvPicPr>
-            <a:picLocks noChangeAspect="1"/>
-          </p:cNvPicPr>
-          <p:nvPr/>
-        </p:nvPicPr>
-        <p:blipFill>
-          <a:blip r:embed="rId2"/>
-          <a:stretch>
-            <a:fillRect/>
-          </a:stretch>
-        </p:blipFill>
-        <p:spPr>
-          <a:xfrm>
-            <a:off x="5852160" y="2308860"/>
-            <a:ext cx="5852160" cy="3291840"/>
-          </a:xfrm>
-          <a:prstGeom prst="rect">
-            <a:avLst/>
-          </a:prstGeom>
-        </p:spPr>
-      </p:pic>
-      <p:sp>
-        <p:nvSpPr>
-          <p:cNvPr id="8" name="Rectangle 7"/>
+      <p:sp>
+        <p:nvSpPr>
+          <p:cNvPr id="7" name="Rectangle 6"/>
           <p:cNvSpPr/>
           <p:nvPr/>
         </p:nvSpPr>
         <p:spPr>
           <a:xfrm>
-            <a:off x="5852160" y="5806440"/>
-            <a:ext cx="5852160" cy="411480"/>
+            <a:off x="5852160" y="1691640"/>
+            <a:ext cx="5852160" cy="4526280"/>
           </a:xfrm>
           <a:prstGeom prst="rect">
             <a:avLst/>
           </a:prstGeom>
           <a:solidFill>
-            <a:srgbClr val="1B1A17"/>
+            <a:srgbClr val="EFE6D2"/>
           </a:solidFill>
-          <a:ln>
-            <a:noFill/>
+          <a:ln w="15875">
+            <a:solidFill>
+              <a:srgbClr val="2F5D34"/>
+            </a:solidFill>
           </a:ln>
           <a:effectLst/>
         </p:spPr>
@@ -9488,14 +9466,53 @@
       </p:sp>
       <p:sp>
         <p:nvSpPr>
+          <p:cNvPr id="8" name="TextBox 7"/>
+          <p:cNvSpPr txBox="1"/>
+          <p:nvPr/>
+        </p:nvSpPr>
+        <p:spPr>
+          <a:xfrm>
+            <a:off x="6080760" y="1874520"/>
+            <a:ext cx="5394960" cy="365760"/>
+          </a:xfrm>
+          <a:prstGeom prst="rect">
+            <a:avLst/>
+          </a:prstGeom>
+          <a:noFill/>
+        </p:spPr>
+        <p:txBody>
+          <a:bodyPr wrap="square" anchor="t" lIns="45720" rIns="45720">
+            <a:spAutoFit/>
+          </a:bodyPr>
+          <a:lstStyle/>
+          <a:p>
+            <a:pPr algn="l">
+              <a:spcAft>
+                <a:spcPts val="800"/>
+              </a:spcAft>
+            </a:pPr>
+            <a:r>
+              <a:rPr sz="1200" b="1">
+                <a:solidFill>
+                  <a:srgbClr val="B24E2A"/>
+                </a:solidFill>
+                <a:latin typeface="Verdana"/>
+              </a:rPr>
+              <a:t>ANIMATION · F-ANI-13 · coming</a:t>
+            </a:r>
+          </a:p>
+        </p:txBody>
+      </p:sp>
+      <p:sp>
+        <p:nvSpPr>
           <p:cNvPr id="9" name="TextBox 8"/>
           <p:cNvSpPr txBox="1"/>
           <p:nvPr/>
         </p:nvSpPr>
         <p:spPr>
           <a:xfrm>
-            <a:off x="5943600" y="5815584"/>
-            <a:ext cx="5669280" cy="384048"/>
+            <a:off x="6080760" y="2258568"/>
+            <a:ext cx="5394960" cy="457200"/>
           </a:xfrm>
           <a:prstGeom prst="rect">
             <a:avLst/>
@@ -9503,7 +9520,7 @@
           <a:noFill/>
         </p:spPr>
         <p:txBody>
-          <a:bodyPr wrap="square" anchor="ctr" lIns="45720" rIns="45720">
+          <a:bodyPr wrap="square" anchor="t" lIns="45720" rIns="45720">
             <a:spAutoFit/>
           </a:bodyPr>
           <a:lstStyle/>
@@ -9514,13 +9531,52 @@
               </a:spcAft>
             </a:pPr>
             <a:r>
+              <a:rPr sz="1800" b="1">
+                <a:solidFill>
+                  <a:srgbClr val="1B1A17"/>
+                </a:solidFill>
+                <a:latin typeface="Rockwell"/>
+              </a:rPr>
+              <a:t>Living soil</a:t>
+            </a:r>
+          </a:p>
+        </p:txBody>
+      </p:sp>
+      <p:sp>
+        <p:nvSpPr>
+          <p:cNvPr id="10" name="TextBox 9"/>
+          <p:cNvSpPr txBox="1"/>
+          <p:nvPr/>
+        </p:nvSpPr>
+        <p:spPr>
+          <a:xfrm>
+            <a:off x="6080760" y="2788920"/>
+            <a:ext cx="5394960" cy="3246120"/>
+          </a:xfrm>
+          <a:prstGeom prst="rect">
+            <a:avLst/>
+          </a:prstGeom>
+          <a:noFill/>
+        </p:spPr>
+        <p:txBody>
+          <a:bodyPr wrap="square" anchor="t" lIns="45720" rIns="45720">
+            <a:spAutoFit/>
+          </a:bodyPr>
+          <a:lstStyle/>
+          <a:p>
+            <a:pPr algn="l">
+              <a:spcAft>
+                <a:spcPts val="800"/>
+              </a:spcAft>
+            </a:pPr>
+            <a:r>
               <a:rPr sz="1100" b="0">
                 <a:solidFill>
-                  <a:srgbClr val="EFE6D2"/>
+                  <a:srgbClr val="1B1A17"/>
                 </a:solidFill>
                 <a:latin typeface="Verdana"/>
               </a:rPr>
-              <a:t>▶  Clip F-ANI-13 · play from the tablet: watch-05-living-soil.mp4</a:t>
+              <a:t>Cut-away of dark garden soil under mulch, magnified: earthworms tunnel, fungus threads link roots, tiny specks of life move, crumbs hold air and water droplets; a fallen leaf above is slowly broken down and pulled into the soil. (Replaces the withdrawn clip `soil-health/watch-05-living-soil.mp4`.)</a:t>
             </a:r>
           </a:p>
         </p:txBody>
@@ -10255,49 +10311,27 @@
           </a:p>
         </p:txBody>
       </p:sp>
-      <p:pic>
-        <p:nvPicPr>
-          <p:cNvPr id="9" name="Picture 8" descr="tour-soil-observation.jpg"/>
-          <p:cNvPicPr>
-            <a:picLocks noChangeAspect="1"/>
-          </p:cNvPicPr>
-          <p:nvPr/>
-        </p:nvPicPr>
-        <p:blipFill>
-          <a:blip r:embed="rId2"/>
-          <a:stretch>
-            <a:fillRect/>
-          </a:stretch>
-        </p:blipFill>
-        <p:spPr>
-          <a:xfrm>
-            <a:off x="5852160" y="2148840"/>
-            <a:ext cx="5852160" cy="4023360"/>
-          </a:xfrm>
-          <a:prstGeom prst="rect">
-            <a:avLst/>
-          </a:prstGeom>
-        </p:spPr>
-      </p:pic>
-      <p:sp>
-        <p:nvSpPr>
-          <p:cNvPr id="10" name="Rectangle 9"/>
+      <p:sp>
+        <p:nvSpPr>
+          <p:cNvPr id="9" name="Rectangle 8"/>
           <p:cNvSpPr/>
           <p:nvPr/>
         </p:nvSpPr>
         <p:spPr>
           <a:xfrm>
-            <a:off x="5852160" y="5806440"/>
-            <a:ext cx="5852160" cy="411480"/>
+            <a:off x="5852160" y="2103120"/>
+            <a:ext cx="5852160" cy="4114800"/>
           </a:xfrm>
           <a:prstGeom prst="rect">
             <a:avLst/>
           </a:prstGeom>
           <a:solidFill>
-            <a:srgbClr val="1B1A17"/>
+            <a:srgbClr val="EFE6D2"/>
           </a:solidFill>
-          <a:ln>
-            <a:noFill/>
+          <a:ln w="15875">
+            <a:solidFill>
+              <a:srgbClr val="2F5D34"/>
+            </a:solidFill>
           </a:ln>
           <a:effectLst/>
         </p:spPr>
@@ -10325,14 +10359,53 @@
       </p:sp>
       <p:sp>
         <p:nvSpPr>
+          <p:cNvPr id="10" name="TextBox 9"/>
+          <p:cNvSpPr txBox="1"/>
+          <p:nvPr/>
+        </p:nvSpPr>
+        <p:spPr>
+          <a:xfrm>
+            <a:off x="6080760" y="2286000"/>
+            <a:ext cx="5394960" cy="365760"/>
+          </a:xfrm>
+          <a:prstGeom prst="rect">
+            <a:avLst/>
+          </a:prstGeom>
+          <a:noFill/>
+        </p:spPr>
+        <p:txBody>
+          <a:bodyPr wrap="square" anchor="t" lIns="45720" rIns="45720">
+            <a:spAutoFit/>
+          </a:bodyPr>
+          <a:lstStyle/>
+          <a:p>
+            <a:pPr algn="l">
+              <a:spcAft>
+                <a:spcPts val="800"/>
+              </a:spcAft>
+            </a:pPr>
+            <a:r>
+              <a:rPr sz="1200" b="1">
+                <a:solidFill>
+                  <a:srgbClr val="B24E2A"/>
+                </a:solidFill>
+                <a:latin typeface="Verdana"/>
+              </a:rPr>
+              <a:t>ANIMATION · F-ANI-14 · coming</a:t>
+            </a:r>
+          </a:p>
+        </p:txBody>
+      </p:sp>
+      <p:sp>
+        <p:nvSpPr>
           <p:cNvPr id="11" name="TextBox 10"/>
           <p:cNvSpPr txBox="1"/>
           <p:nvPr/>
         </p:nvSpPr>
         <p:spPr>
           <a:xfrm>
-            <a:off x="5943600" y="5815584"/>
-            <a:ext cx="5669280" cy="384048"/>
+            <a:off x="6080760" y="2670048"/>
+            <a:ext cx="5394960" cy="457200"/>
           </a:xfrm>
           <a:prstGeom prst="rect">
             <a:avLst/>
@@ -10340,7 +10413,7 @@
           <a:noFill/>
         </p:spPr>
         <p:txBody>
-          <a:bodyPr wrap="square" anchor="ctr" lIns="45720" rIns="45720">
+          <a:bodyPr wrap="square" anchor="t" lIns="45720" rIns="45720">
             <a:spAutoFit/>
           </a:bodyPr>
           <a:lstStyle/>
@@ -10351,13 +10424,52 @@
               </a:spcAft>
             </a:pPr>
             <a:r>
+              <a:rPr sz="1800" b="1">
+                <a:solidFill>
+                  <a:srgbClr val="1B1A17"/>
+                </a:solidFill>
+                <a:latin typeface="Rockwell"/>
+              </a:rPr>
+              <a:t>Soil observation</a:t>
+            </a:r>
+          </a:p>
+        </p:txBody>
+      </p:sp>
+      <p:sp>
+        <p:nvSpPr>
+          <p:cNvPr id="12" name="TextBox 11"/>
+          <p:cNvSpPr txBox="1"/>
+          <p:nvPr/>
+        </p:nvSpPr>
+        <p:spPr>
+          <a:xfrm>
+            <a:off x="6080760" y="3200400"/>
+            <a:ext cx="5394960" cy="2834640"/>
+          </a:xfrm>
+          <a:prstGeom prst="rect">
+            <a:avLst/>
+          </a:prstGeom>
+          <a:noFill/>
+        </p:spPr>
+        <p:txBody>
+          <a:bodyPr wrap="square" anchor="t" lIns="45720" rIns="45720">
+            <a:spAutoFit/>
+          </a:bodyPr>
+          <a:lstStyle/>
+          <a:p>
+            <a:pPr algn="l">
+              <a:spcAft>
+                <a:spcPts val="800"/>
+              </a:spcAft>
+            </a:pPr>
+            <a:r>
               <a:rPr sz="1100" b="0">
                 <a:solidFill>
-                  <a:srgbClr val="EFE6D2"/>
+                  <a:srgbClr val="1B1A17"/>
                 </a:solidFill>
                 <a:latin typeface="Verdana"/>
               </a:rPr>
-              <a:t>▶  Clip F-ANI-14 · play from the tablet: tour-soil-observation.mp4</a:t>
+              <a:t>Hands dig a spade-deep square of garden soil, lift it and crumble it: dark crumbs, fine roots, an earthworm, fungus threads. Beside it a pale hard lump from a path cracks apart with nothing living in it. Slow side-by-side comparison. (Replaces the withdrawn clip `soil-health/tour-soil-observation.mp4`.)</a:t>
             </a:r>
           </a:p>
         </p:txBody>
